--- a/presentation.pptx
+++ b/presentation.pptx
@@ -10,14 +10,14 @@
   <p:sldIdLst>
     <p:sldId id="280" r:id="rId2"/>
     <p:sldId id="301" r:id="rId3"/>
-    <p:sldId id="282" r:id="rId4"/>
-    <p:sldId id="287" r:id="rId5"/>
-    <p:sldId id="304" r:id="rId6"/>
-    <p:sldId id="300" r:id="rId7"/>
-    <p:sldId id="262" r:id="rId8"/>
-    <p:sldId id="302" r:id="rId9"/>
-    <p:sldId id="305" r:id="rId10"/>
-    <p:sldId id="292" r:id="rId11"/>
+    <p:sldId id="306" r:id="rId4"/>
+    <p:sldId id="282" r:id="rId5"/>
+    <p:sldId id="287" r:id="rId6"/>
+    <p:sldId id="304" r:id="rId7"/>
+    <p:sldId id="300" r:id="rId8"/>
+    <p:sldId id="262" r:id="rId9"/>
+    <p:sldId id="302" r:id="rId10"/>
+    <p:sldId id="305" r:id="rId11"/>
     <p:sldId id="296" r:id="rId12"/>
     <p:sldId id="295" r:id="rId13"/>
     <p:sldId id="299" r:id="rId14"/>
@@ -210,7 +210,7 @@
           <a:p>
             <a:fld id="{111DF09B-9362-4496-A2D3-B7D8BDC70495}" type="datetimeFigureOut">
               <a:rPr lang="en-IN" smtClean="0"/>
-              <a:t>10-10-2026</a:t>
+              <a:t>13-10-2026</a:t>
             </a:fld>
             <a:endParaRPr lang="en-IN"/>
           </a:p>
@@ -543,7 +543,7 @@
           <a:p>
             <a:fld id="{2A5C63DF-5CC8-4CB2-B0B3-ACC4B2229F3A}" type="slidenum">
               <a:rPr lang="en-IN" smtClean="0"/>
-              <a:t>7</a:t>
+              <a:t>8</a:t>
             </a:fld>
             <a:endParaRPr lang="en-IN"/>
           </a:p>
@@ -711,7 +711,7 @@
           <a:p>
             <a:fld id="{266F3517-9500-41F0-A315-BBB928228315}" type="datetimeFigureOut">
               <a:rPr lang="en-IN" smtClean="0"/>
-              <a:t>10-10-2026</a:t>
+              <a:t>13-10-2026</a:t>
             </a:fld>
             <a:endParaRPr lang="en-IN"/>
           </a:p>
@@ -911,7 +911,7 @@
           <a:p>
             <a:fld id="{266F3517-9500-41F0-A315-BBB928228315}" type="datetimeFigureOut">
               <a:rPr lang="en-IN" smtClean="0"/>
-              <a:t>10-10-2026</a:t>
+              <a:t>13-10-2026</a:t>
             </a:fld>
             <a:endParaRPr lang="en-IN"/>
           </a:p>
@@ -1121,7 +1121,7 @@
           <a:p>
             <a:fld id="{266F3517-9500-41F0-A315-BBB928228315}" type="datetimeFigureOut">
               <a:rPr lang="en-IN" smtClean="0"/>
-              <a:t>10-10-2026</a:t>
+              <a:t>13-10-2026</a:t>
             </a:fld>
             <a:endParaRPr lang="en-IN"/>
           </a:p>
@@ -1321,7 +1321,7 @@
           <a:p>
             <a:fld id="{266F3517-9500-41F0-A315-BBB928228315}" type="datetimeFigureOut">
               <a:rPr lang="en-IN" smtClean="0"/>
-              <a:t>10-10-2026</a:t>
+              <a:t>13-10-2026</a:t>
             </a:fld>
             <a:endParaRPr lang="en-IN"/>
           </a:p>
@@ -1597,7 +1597,7 @@
           <a:p>
             <a:fld id="{266F3517-9500-41F0-A315-BBB928228315}" type="datetimeFigureOut">
               <a:rPr lang="en-IN" smtClean="0"/>
-              <a:t>10-10-2026</a:t>
+              <a:t>13-10-2026</a:t>
             </a:fld>
             <a:endParaRPr lang="en-IN"/>
           </a:p>
@@ -1865,7 +1865,7 @@
           <a:p>
             <a:fld id="{266F3517-9500-41F0-A315-BBB928228315}" type="datetimeFigureOut">
               <a:rPr lang="en-IN" smtClean="0"/>
-              <a:t>10-10-2026</a:t>
+              <a:t>13-10-2026</a:t>
             </a:fld>
             <a:endParaRPr lang="en-IN"/>
           </a:p>
@@ -2280,7 +2280,7 @@
           <a:p>
             <a:fld id="{266F3517-9500-41F0-A315-BBB928228315}" type="datetimeFigureOut">
               <a:rPr lang="en-IN" smtClean="0"/>
-              <a:t>10-10-2026</a:t>
+              <a:t>13-10-2026</a:t>
             </a:fld>
             <a:endParaRPr lang="en-IN"/>
           </a:p>
@@ -2422,7 +2422,7 @@
           <a:p>
             <a:fld id="{266F3517-9500-41F0-A315-BBB928228315}" type="datetimeFigureOut">
               <a:rPr lang="en-IN" smtClean="0"/>
-              <a:t>10-10-2026</a:t>
+              <a:t>13-10-2026</a:t>
             </a:fld>
             <a:endParaRPr lang="en-IN"/>
           </a:p>
@@ -2535,7 +2535,7 @@
           <a:p>
             <a:fld id="{266F3517-9500-41F0-A315-BBB928228315}" type="datetimeFigureOut">
               <a:rPr lang="en-IN" smtClean="0"/>
-              <a:t>10-10-2026</a:t>
+              <a:t>13-10-2026</a:t>
             </a:fld>
             <a:endParaRPr lang="en-IN"/>
           </a:p>
@@ -2848,7 +2848,7 @@
           <a:p>
             <a:fld id="{266F3517-9500-41F0-A315-BBB928228315}" type="datetimeFigureOut">
               <a:rPr lang="en-IN" smtClean="0"/>
-              <a:t>10-10-2026</a:t>
+              <a:t>13-10-2026</a:t>
             </a:fld>
             <a:endParaRPr lang="en-IN"/>
           </a:p>
@@ -3137,7 +3137,7 @@
           <a:p>
             <a:fld id="{266F3517-9500-41F0-A315-BBB928228315}" type="datetimeFigureOut">
               <a:rPr lang="en-IN" smtClean="0"/>
-              <a:t>10-10-2026</a:t>
+              <a:t>13-10-2026</a:t>
             </a:fld>
             <a:endParaRPr lang="en-IN"/>
           </a:p>
@@ -3380,7 +3380,7 @@
           <a:p>
             <a:fld id="{266F3517-9500-41F0-A315-BBB928228315}" type="datetimeFigureOut">
               <a:rPr lang="en-IN" smtClean="0"/>
-              <a:t>10-10-2026</a:t>
+              <a:t>13-10-2026</a:t>
             </a:fld>
             <a:endParaRPr lang="en-IN"/>
           </a:p>
@@ -4339,567 +4339,82 @@
           <a:chExt cx="0" cy="0"/>
         </a:xfrm>
       </p:grpSpPr>
+      <p:sp>
+        <p:nvSpPr>
+          <p:cNvPr id="2" name="Title 1">
+            <a:extLst>
+              <a:ext uri="{FF2B5EF4-FFF2-40B4-BE49-F238E27FC236}">
+                <a16:creationId xmlns:a16="http://schemas.microsoft.com/office/drawing/2014/main" id="{74B89128-5671-8C7A-4CC0-726D9B32000A}"/>
+              </a:ext>
+            </a:extLst>
+          </p:cNvPr>
+          <p:cNvSpPr>
+            <a:spLocks noGrp="1"/>
+          </p:cNvSpPr>
+          <p:nvPr>
+            <p:ph type="title"/>
+          </p:nvPr>
+        </p:nvSpPr>
+        <p:spPr>
+          <a:xfrm>
+            <a:off x="1302026" y="257382"/>
+            <a:ext cx="10031896" cy="1193731"/>
+          </a:xfrm>
+        </p:spPr>
+        <p:txBody>
+          <a:bodyPr>
+            <a:normAutofit/>
+          </a:bodyPr>
+          <a:lstStyle/>
+          <a:p>
+            <a:pPr algn="ctr"/>
+            <a:r>
+              <a:rPr lang="en-IN" sz="3600" dirty="0">
+                <a:solidFill>
+                  <a:srgbClr val="FF0000"/>
+                </a:solidFill>
+                <a:latin typeface="Times New Roman" panose="02020603050405020304" pitchFamily="18" charset="0"/>
+                <a:cs typeface="Times New Roman" panose="02020603050405020304" pitchFamily="18" charset="0"/>
+              </a:rPr>
+              <a:t>ARCHITECTURE DIAGRAM</a:t>
+            </a:r>
+          </a:p>
+        </p:txBody>
+      </p:sp>
       <p:pic>
         <p:nvPicPr>
-          <p:cNvPr id="4" name="object 3">
-            <a:extLst>
-              <a:ext uri="{FF2B5EF4-FFF2-40B4-BE49-F238E27FC236}">
-                <a16:creationId xmlns:a16="http://schemas.microsoft.com/office/drawing/2014/main" id="{35B8A977-A078-44D9-C11E-A1E3285638AC}"/>
-              </a:ext>
-            </a:extLst>
-          </p:cNvPr>
-          <p:cNvPicPr/>
+          <p:cNvPr id="6" name="Picture 5">
+            <a:extLst>
+              <a:ext uri="{FF2B5EF4-FFF2-40B4-BE49-F238E27FC236}">
+                <a16:creationId xmlns:a16="http://schemas.microsoft.com/office/drawing/2014/main" id="{E4BF12A8-E194-D698-7FF1-19B9D466BB42}"/>
+              </a:ext>
+            </a:extLst>
+          </p:cNvPr>
+          <p:cNvPicPr>
+            <a:picLocks noChangeAspect="1"/>
+          </p:cNvPicPr>
           <p:nvPr/>
         </p:nvPicPr>
         <p:blipFill>
-          <a:blip r:embed="rId2" cstate="print"/>
+          <a:blip r:embed="rId2"/>
           <a:stretch>
             <a:fillRect/>
           </a:stretch>
         </p:blipFill>
         <p:spPr>
           <a:xfrm>
-            <a:off x="225851" y="308745"/>
-            <a:ext cx="822923" cy="914400"/>
+            <a:off x="2141220" y="1129475"/>
+            <a:ext cx="7571232" cy="5047488"/>
           </a:xfrm>
           <a:prstGeom prst="rect">
             <a:avLst/>
           </a:prstGeom>
         </p:spPr>
       </p:pic>
-      <p:pic>
-        <p:nvPicPr>
-          <p:cNvPr id="5" name="object 4">
-            <a:extLst>
-              <a:ext uri="{FF2B5EF4-FFF2-40B4-BE49-F238E27FC236}">
-                <a16:creationId xmlns:a16="http://schemas.microsoft.com/office/drawing/2014/main" id="{3956F49B-DA3A-508B-5CB7-1029961FC8B2}"/>
-              </a:ext>
-            </a:extLst>
-          </p:cNvPr>
-          <p:cNvPicPr/>
-          <p:nvPr/>
-        </p:nvPicPr>
-        <p:blipFill>
-          <a:blip r:embed="rId3" cstate="print"/>
-          <a:stretch>
-            <a:fillRect/>
-          </a:stretch>
-        </p:blipFill>
-        <p:spPr>
-          <a:xfrm>
-            <a:off x="10831033" y="308745"/>
-            <a:ext cx="1135116" cy="914400"/>
-          </a:xfrm>
-          <a:prstGeom prst="rect">
-            <a:avLst/>
-          </a:prstGeom>
-        </p:spPr>
-      </p:pic>
-      <p:sp>
-        <p:nvSpPr>
-          <p:cNvPr id="6" name="TextBox 5">
-            <a:extLst>
-              <a:ext uri="{FF2B5EF4-FFF2-40B4-BE49-F238E27FC236}">
-                <a16:creationId xmlns:a16="http://schemas.microsoft.com/office/drawing/2014/main" id="{D7D895FA-67D8-E421-2314-2C742D9F04FE}"/>
-              </a:ext>
-            </a:extLst>
-          </p:cNvPr>
-          <p:cNvSpPr txBox="1"/>
-          <p:nvPr/>
-        </p:nvSpPr>
-        <p:spPr>
-          <a:xfrm>
-            <a:off x="1109653" y="1352316"/>
-            <a:ext cx="5047226" cy="2031325"/>
-          </a:xfrm>
-          <a:prstGeom prst="rect">
-            <a:avLst/>
-          </a:prstGeom>
-          <a:noFill/>
-        </p:spPr>
-        <p:txBody>
-          <a:bodyPr wrap="square" rtlCol="0">
-            <a:spAutoFit/>
-          </a:bodyPr>
-          <a:lstStyle/>
-          <a:p>
-            <a:r>
-              <a:rPr lang="en-IN" b="1" dirty="0">
-                <a:latin typeface="Times New Roman" panose="02020603050405020304" pitchFamily="18" charset="0"/>
-                <a:cs typeface="Times New Roman" panose="02020603050405020304" pitchFamily="18" charset="0"/>
-              </a:rPr>
-              <a:t>Project Components</a:t>
-            </a:r>
-          </a:p>
-          <a:p>
-            <a:pPr>
-              <a:buFont typeface="+mj-lt"/>
-              <a:buAutoNum type="arabicPeriod"/>
-            </a:pPr>
-            <a:r>
-              <a:rPr lang="en-IN" dirty="0">
-                <a:latin typeface="Times New Roman" panose="02020603050405020304" pitchFamily="18" charset="0"/>
-                <a:cs typeface="Times New Roman" panose="02020603050405020304" pitchFamily="18" charset="0"/>
-              </a:rPr>
-              <a:t>User Management</a:t>
-            </a:r>
-          </a:p>
-          <a:p>
-            <a:pPr>
-              <a:buFont typeface="+mj-lt"/>
-              <a:buAutoNum type="arabicPeriod"/>
-            </a:pPr>
-            <a:r>
-              <a:rPr lang="en-IN" dirty="0">
-                <a:latin typeface="Times New Roman" panose="02020603050405020304" pitchFamily="18" charset="0"/>
-                <a:cs typeface="Times New Roman" panose="02020603050405020304" pitchFamily="18" charset="0"/>
-              </a:rPr>
-              <a:t>Activity Management</a:t>
-            </a:r>
-          </a:p>
-          <a:p>
-            <a:pPr>
-              <a:buFont typeface="+mj-lt"/>
-              <a:buAutoNum type="arabicPeriod"/>
-            </a:pPr>
-            <a:r>
-              <a:rPr lang="en-IN" dirty="0">
-                <a:latin typeface="Times New Roman" panose="02020603050405020304" pitchFamily="18" charset="0"/>
-                <a:cs typeface="Times New Roman" panose="02020603050405020304" pitchFamily="18" charset="0"/>
-              </a:rPr>
-              <a:t>Participation Management</a:t>
-            </a:r>
-          </a:p>
-          <a:p>
-            <a:pPr>
-              <a:buFont typeface="+mj-lt"/>
-              <a:buAutoNum type="arabicPeriod"/>
-            </a:pPr>
-            <a:r>
-              <a:rPr lang="en-IN" dirty="0">
-                <a:latin typeface="Times New Roman" panose="02020603050405020304" pitchFamily="18" charset="0"/>
-                <a:cs typeface="Times New Roman" panose="02020603050405020304" pitchFamily="18" charset="0"/>
-              </a:rPr>
-              <a:t>Administration and Engagement</a:t>
-            </a:r>
-          </a:p>
-          <a:p>
-            <a:pPr>
-              <a:buFont typeface="+mj-lt"/>
-              <a:buAutoNum type="arabicPeriod"/>
-            </a:pPr>
-            <a:r>
-              <a:rPr lang="en-IN" dirty="0">
-                <a:latin typeface="Times New Roman" panose="02020603050405020304" pitchFamily="18" charset="0"/>
-                <a:cs typeface="Times New Roman" panose="02020603050405020304" pitchFamily="18" charset="0"/>
-              </a:rPr>
-              <a:t>Notification System</a:t>
-            </a:r>
-          </a:p>
-          <a:p>
-            <a:endParaRPr lang="en-US" dirty="0">
-              <a:latin typeface="Times New Roman" panose="02020603050405020304" pitchFamily="18" charset="0"/>
-              <a:cs typeface="Times New Roman" panose="02020603050405020304" pitchFamily="18" charset="0"/>
-            </a:endParaRPr>
-          </a:p>
-        </p:txBody>
-      </p:sp>
-      <p:sp>
-        <p:nvSpPr>
-          <p:cNvPr id="9" name="TextBox 8">
-            <a:extLst>
-              <a:ext uri="{FF2B5EF4-FFF2-40B4-BE49-F238E27FC236}">
-                <a16:creationId xmlns:a16="http://schemas.microsoft.com/office/drawing/2014/main" id="{2F0B0364-25E1-EC55-05E5-EBD60346229E}"/>
-              </a:ext>
-            </a:extLst>
-          </p:cNvPr>
-          <p:cNvSpPr txBox="1"/>
-          <p:nvPr/>
-        </p:nvSpPr>
-        <p:spPr>
-          <a:xfrm>
-            <a:off x="7596873" y="1362292"/>
-            <a:ext cx="3657600" cy="2246769"/>
-          </a:xfrm>
-          <a:prstGeom prst="rect">
-            <a:avLst/>
-          </a:prstGeom>
-          <a:noFill/>
-        </p:spPr>
-        <p:txBody>
-          <a:bodyPr wrap="square" rtlCol="0">
-            <a:spAutoFit/>
-          </a:bodyPr>
-          <a:lstStyle/>
-          <a:p>
-            <a:r>
-              <a:rPr lang="fr-FR" sz="2000" b="1" dirty="0">
-                <a:latin typeface="Times New Roman" panose="02020603050405020304" pitchFamily="18" charset="0"/>
-                <a:cs typeface="Times New Roman" panose="02020603050405020304" pitchFamily="18" charset="0"/>
-              </a:rPr>
-              <a:t>Software </a:t>
-            </a:r>
-            <a:r>
-              <a:rPr lang="fr-FR" sz="2000" b="1" dirty="0" err="1">
-                <a:latin typeface="Times New Roman" panose="02020603050405020304" pitchFamily="18" charset="0"/>
-                <a:cs typeface="Times New Roman" panose="02020603050405020304" pitchFamily="18" charset="0"/>
-              </a:rPr>
-              <a:t>Requirements</a:t>
-            </a:r>
-            <a:endParaRPr lang="fr-FR" sz="2000" b="1" dirty="0">
-              <a:latin typeface="Times New Roman" panose="02020603050405020304" pitchFamily="18" charset="0"/>
-              <a:cs typeface="Times New Roman" panose="02020603050405020304" pitchFamily="18" charset="0"/>
-            </a:endParaRPr>
-          </a:p>
-          <a:p>
-            <a:pPr>
-              <a:buFont typeface="+mj-lt"/>
-              <a:buAutoNum type="arabicPeriod"/>
-            </a:pPr>
-            <a:r>
-              <a:rPr lang="fr-FR" sz="2000" dirty="0">
-                <a:latin typeface="Times New Roman" panose="02020603050405020304" pitchFamily="18" charset="0"/>
-                <a:cs typeface="Times New Roman" panose="02020603050405020304" pitchFamily="18" charset="0"/>
-              </a:rPr>
-              <a:t>Frontend Technologies</a:t>
-            </a:r>
-          </a:p>
-          <a:p>
-            <a:pPr>
-              <a:buFont typeface="+mj-lt"/>
-              <a:buAutoNum type="arabicPeriod"/>
-            </a:pPr>
-            <a:r>
-              <a:rPr lang="fr-FR" sz="2000" dirty="0">
-                <a:latin typeface="Times New Roman" panose="02020603050405020304" pitchFamily="18" charset="0"/>
-                <a:cs typeface="Times New Roman" panose="02020603050405020304" pitchFamily="18" charset="0"/>
-              </a:rPr>
-              <a:t>Backend Technologies</a:t>
-            </a:r>
-          </a:p>
-          <a:p>
-            <a:pPr>
-              <a:buFont typeface="+mj-lt"/>
-              <a:buAutoNum type="arabicPeriod"/>
-            </a:pPr>
-            <a:r>
-              <a:rPr lang="fr-FR" sz="2000" dirty="0" err="1">
-                <a:latin typeface="Times New Roman" panose="02020603050405020304" pitchFamily="18" charset="0"/>
-                <a:cs typeface="Times New Roman" panose="02020603050405020304" pitchFamily="18" charset="0"/>
-              </a:rPr>
-              <a:t>Database</a:t>
-            </a:r>
-            <a:endParaRPr lang="fr-FR" sz="2000" dirty="0">
-              <a:latin typeface="Times New Roman" panose="02020603050405020304" pitchFamily="18" charset="0"/>
-              <a:cs typeface="Times New Roman" panose="02020603050405020304" pitchFamily="18" charset="0"/>
-            </a:endParaRPr>
-          </a:p>
-          <a:p>
-            <a:pPr>
-              <a:buFont typeface="+mj-lt"/>
-              <a:buAutoNum type="arabicPeriod"/>
-            </a:pPr>
-            <a:r>
-              <a:rPr lang="fr-FR" sz="2000" dirty="0">
-                <a:latin typeface="Times New Roman" panose="02020603050405020304" pitchFamily="18" charset="0"/>
-                <a:cs typeface="Times New Roman" panose="02020603050405020304" pitchFamily="18" charset="0"/>
-              </a:rPr>
-              <a:t>Communication Technologies</a:t>
-            </a:r>
-          </a:p>
-          <a:p>
-            <a:pPr>
-              <a:buFont typeface="+mj-lt"/>
-              <a:buAutoNum type="arabicPeriod"/>
-            </a:pPr>
-            <a:r>
-              <a:rPr lang="fr-FR" sz="2000" dirty="0">
-                <a:latin typeface="Times New Roman" panose="02020603050405020304" pitchFamily="18" charset="0"/>
-                <a:cs typeface="Times New Roman" panose="02020603050405020304" pitchFamily="18" charset="0"/>
-              </a:rPr>
-              <a:t>Security Technologies</a:t>
-            </a:r>
-          </a:p>
-          <a:p>
-            <a:pPr marL="342900" indent="-342900" algn="just">
-              <a:buFont typeface="Wingdings" panose="05000000000000000000" pitchFamily="2" charset="2"/>
-              <a:buChar char="Ø"/>
-            </a:pPr>
-            <a:endParaRPr lang="en-IN" sz="2000" dirty="0">
-              <a:latin typeface="Times New Roman" panose="02020603050405020304" pitchFamily="18" charset="0"/>
-              <a:cs typeface="Times New Roman" panose="02020603050405020304" pitchFamily="18" charset="0"/>
-            </a:endParaRPr>
-          </a:p>
-        </p:txBody>
-      </p:sp>
-      <p:sp>
-        <p:nvSpPr>
-          <p:cNvPr id="10" name="TextBox 9">
-            <a:extLst>
-              <a:ext uri="{FF2B5EF4-FFF2-40B4-BE49-F238E27FC236}">
-                <a16:creationId xmlns:a16="http://schemas.microsoft.com/office/drawing/2014/main" id="{AC5A5BE0-027F-A59B-0EA5-98AC78EE9D2C}"/>
-              </a:ext>
-            </a:extLst>
-          </p:cNvPr>
-          <p:cNvSpPr txBox="1"/>
-          <p:nvPr/>
-        </p:nvSpPr>
-        <p:spPr>
-          <a:xfrm>
-            <a:off x="7452756" y="3609061"/>
-            <a:ext cx="3945835" cy="2246769"/>
-          </a:xfrm>
-          <a:prstGeom prst="rect">
-            <a:avLst/>
-          </a:prstGeom>
-          <a:noFill/>
-        </p:spPr>
-        <p:txBody>
-          <a:bodyPr wrap="square" rtlCol="0">
-            <a:spAutoFit/>
-          </a:bodyPr>
-          <a:lstStyle/>
-          <a:p>
-            <a:r>
-              <a:rPr lang="en-IN" sz="2000" b="1" dirty="0">
-                <a:latin typeface="Times New Roman" panose="02020603050405020304" pitchFamily="18" charset="0"/>
-                <a:cs typeface="Times New Roman" panose="02020603050405020304" pitchFamily="18" charset="0"/>
-              </a:rPr>
-              <a:t>Hardware Requirements</a:t>
-            </a:r>
-          </a:p>
-          <a:p>
-            <a:pPr>
-              <a:buFont typeface="+mj-lt"/>
-              <a:buAutoNum type="arabicPeriod"/>
-            </a:pPr>
-            <a:r>
-              <a:rPr lang="en-IN" sz="2000" dirty="0">
-                <a:latin typeface="Times New Roman" panose="02020603050405020304" pitchFamily="18" charset="0"/>
-                <a:cs typeface="Times New Roman" panose="02020603050405020304" pitchFamily="18" charset="0"/>
-              </a:rPr>
-              <a:t>Processor</a:t>
-            </a:r>
-          </a:p>
-          <a:p>
-            <a:pPr>
-              <a:buFont typeface="+mj-lt"/>
-              <a:buAutoNum type="arabicPeriod"/>
-            </a:pPr>
-            <a:r>
-              <a:rPr lang="en-IN" sz="2000" dirty="0">
-                <a:latin typeface="Times New Roman" panose="02020603050405020304" pitchFamily="18" charset="0"/>
-                <a:cs typeface="Times New Roman" panose="02020603050405020304" pitchFamily="18" charset="0"/>
-              </a:rPr>
-              <a:t>RAM</a:t>
-            </a:r>
-          </a:p>
-          <a:p>
-            <a:pPr>
-              <a:buFont typeface="+mj-lt"/>
-              <a:buAutoNum type="arabicPeriod"/>
-            </a:pPr>
-            <a:r>
-              <a:rPr lang="en-IN" sz="2000" dirty="0">
-                <a:latin typeface="Times New Roman" panose="02020603050405020304" pitchFamily="18" charset="0"/>
-                <a:cs typeface="Times New Roman" panose="02020603050405020304" pitchFamily="18" charset="0"/>
-              </a:rPr>
-              <a:t>Storage</a:t>
-            </a:r>
-          </a:p>
-          <a:p>
-            <a:pPr>
-              <a:buFont typeface="+mj-lt"/>
-              <a:buAutoNum type="arabicPeriod"/>
-            </a:pPr>
-            <a:r>
-              <a:rPr lang="en-IN" sz="2000" dirty="0">
-                <a:latin typeface="Times New Roman" panose="02020603050405020304" pitchFamily="18" charset="0"/>
-                <a:cs typeface="Times New Roman" panose="02020603050405020304" pitchFamily="18" charset="0"/>
-              </a:rPr>
-              <a:t>Device</a:t>
-            </a:r>
-          </a:p>
-          <a:p>
-            <a:pPr>
-              <a:buFont typeface="+mj-lt"/>
-              <a:buAutoNum type="arabicPeriod"/>
-            </a:pPr>
-            <a:r>
-              <a:rPr lang="en-IN" sz="2000" dirty="0">
-                <a:latin typeface="Times New Roman" panose="02020603050405020304" pitchFamily="18" charset="0"/>
-                <a:cs typeface="Times New Roman" panose="02020603050405020304" pitchFamily="18" charset="0"/>
-              </a:rPr>
-              <a:t>Internet Connection</a:t>
-            </a:r>
-          </a:p>
-          <a:p>
-            <a:pPr marL="342900" indent="-342900" algn="just">
-              <a:buFont typeface="Arial" panose="020B0604020202020204" pitchFamily="34" charset="0"/>
-              <a:buChar char="•"/>
-            </a:pPr>
-            <a:endParaRPr lang="en-IN" sz="2000" dirty="0">
-              <a:latin typeface="Times New Roman" panose="02020603050405020304" pitchFamily="18" charset="0"/>
-              <a:cs typeface="Times New Roman" panose="02020603050405020304" pitchFamily="18" charset="0"/>
-            </a:endParaRPr>
-          </a:p>
-        </p:txBody>
-      </p:sp>
-      <p:sp>
-        <p:nvSpPr>
-          <p:cNvPr id="11" name="TextBox 10">
-            <a:extLst>
-              <a:ext uri="{FF2B5EF4-FFF2-40B4-BE49-F238E27FC236}">
-                <a16:creationId xmlns:a16="http://schemas.microsoft.com/office/drawing/2014/main" id="{8346B5FD-150E-EBB5-9DF7-53FBB05943E6}"/>
-              </a:ext>
-            </a:extLst>
-          </p:cNvPr>
-          <p:cNvSpPr txBox="1"/>
-          <p:nvPr/>
-        </p:nvSpPr>
-        <p:spPr>
-          <a:xfrm>
-            <a:off x="1908314" y="417443"/>
-            <a:ext cx="7086600" cy="646331"/>
-          </a:xfrm>
-          <a:prstGeom prst="rect">
-            <a:avLst/>
-          </a:prstGeom>
-          <a:noFill/>
-        </p:spPr>
-        <p:txBody>
-          <a:bodyPr wrap="square" rtlCol="0">
-            <a:spAutoFit/>
-          </a:bodyPr>
-          <a:lstStyle/>
-          <a:p>
-            <a:pPr algn="ctr"/>
-            <a:r>
-              <a:rPr lang="en-IN" sz="3600" dirty="0">
-                <a:solidFill>
-                  <a:srgbClr val="C00000"/>
-                </a:solidFill>
-                <a:latin typeface="Times New Roman" panose="02020603050405020304" pitchFamily="18" charset="0"/>
-                <a:cs typeface="Times New Roman" panose="02020603050405020304" pitchFamily="18" charset="0"/>
-              </a:rPr>
-              <a:t>Project Component Requirements</a:t>
-            </a:r>
-          </a:p>
-        </p:txBody>
-      </p:sp>
-      <p:sp>
-        <p:nvSpPr>
-          <p:cNvPr id="2" name="TextBox 1">
-            <a:extLst>
-              <a:ext uri="{FF2B5EF4-FFF2-40B4-BE49-F238E27FC236}">
-                <a16:creationId xmlns:a16="http://schemas.microsoft.com/office/drawing/2014/main" id="{1735AC41-B6CD-04BB-0DC2-B2A8A32A3F0D}"/>
-              </a:ext>
-            </a:extLst>
-          </p:cNvPr>
-          <p:cNvSpPr txBox="1"/>
-          <p:nvPr/>
-        </p:nvSpPr>
-        <p:spPr>
-          <a:xfrm>
-            <a:off x="1048774" y="3502142"/>
-            <a:ext cx="4921406" cy="2031325"/>
-          </a:xfrm>
-          <a:prstGeom prst="rect">
-            <a:avLst/>
-          </a:prstGeom>
-          <a:noFill/>
-        </p:spPr>
-        <p:txBody>
-          <a:bodyPr wrap="square" rtlCol="0">
-            <a:spAutoFit/>
-          </a:bodyPr>
-          <a:lstStyle/>
-          <a:p>
-            <a:r>
-              <a:rPr lang="en-US" b="1" dirty="0">
-                <a:latin typeface="Times New Roman" panose="02020603050405020304" pitchFamily="18" charset="0"/>
-                <a:cs typeface="Times New Roman" panose="02020603050405020304" pitchFamily="18" charset="0"/>
-              </a:rPr>
-              <a:t>Functional Requirements</a:t>
-            </a:r>
-          </a:p>
-          <a:p>
-            <a:pPr>
-              <a:buFont typeface="+mj-lt"/>
-              <a:buAutoNum type="arabicPeriod"/>
-            </a:pPr>
-            <a:r>
-              <a:rPr lang="en-US" dirty="0">
-                <a:latin typeface="Times New Roman" panose="02020603050405020304" pitchFamily="18" charset="0"/>
-                <a:cs typeface="Times New Roman" panose="02020603050405020304" pitchFamily="18" charset="0"/>
-              </a:rPr>
-              <a:t>User Registration and Login</a:t>
-            </a:r>
-          </a:p>
-          <a:p>
-            <a:pPr>
-              <a:buFont typeface="+mj-lt"/>
-              <a:buAutoNum type="arabicPeriod"/>
-            </a:pPr>
-            <a:r>
-              <a:rPr lang="en-US" dirty="0">
-                <a:latin typeface="Times New Roman" panose="02020603050405020304" pitchFamily="18" charset="0"/>
-                <a:cs typeface="Times New Roman" panose="02020603050405020304" pitchFamily="18" charset="0"/>
-              </a:rPr>
-              <a:t>Activity Creation and Management</a:t>
-            </a:r>
-          </a:p>
-          <a:p>
-            <a:pPr>
-              <a:buFont typeface="+mj-lt"/>
-              <a:buAutoNum type="arabicPeriod"/>
-            </a:pPr>
-            <a:r>
-              <a:rPr lang="en-US" dirty="0">
-                <a:latin typeface="Times New Roman" panose="02020603050405020304" pitchFamily="18" charset="0"/>
-                <a:cs typeface="Times New Roman" panose="02020603050405020304" pitchFamily="18" charset="0"/>
-              </a:rPr>
-              <a:t>Activity Joining and Waitlist Management</a:t>
-            </a:r>
-          </a:p>
-          <a:p>
-            <a:pPr>
-              <a:buFont typeface="+mj-lt"/>
-              <a:buAutoNum type="arabicPeriod"/>
-            </a:pPr>
-            <a:r>
-              <a:rPr lang="en-US" dirty="0">
-                <a:latin typeface="Times New Roman" panose="02020603050405020304" pitchFamily="18" charset="0"/>
-                <a:cs typeface="Times New Roman" panose="02020603050405020304" pitchFamily="18" charset="0"/>
-              </a:rPr>
-              <a:t>Administration and Approval</a:t>
-            </a:r>
-          </a:p>
-          <a:p>
-            <a:pPr>
-              <a:buFont typeface="+mj-lt"/>
-              <a:buAutoNum type="arabicPeriod"/>
-            </a:pPr>
-            <a:r>
-              <a:rPr lang="en-US" dirty="0">
-                <a:latin typeface="Times New Roman" panose="02020603050405020304" pitchFamily="18" charset="0"/>
-                <a:cs typeface="Times New Roman" panose="02020603050405020304" pitchFamily="18" charset="0"/>
-              </a:rPr>
-              <a:t>Reviews, Ratings, and Recommendations</a:t>
-            </a:r>
-          </a:p>
-          <a:p>
-            <a:endParaRPr lang="en-IN" dirty="0">
-              <a:latin typeface="Times New Roman" panose="02020603050405020304" pitchFamily="18" charset="0"/>
-              <a:cs typeface="Times New Roman" panose="02020603050405020304" pitchFamily="18" charset="0"/>
-            </a:endParaRPr>
-          </a:p>
-        </p:txBody>
-      </p:sp>
     </p:spTree>
     <p:extLst>
       <p:ext uri="{BB962C8B-B14F-4D97-AF65-F5344CB8AC3E}">
-        <p14:creationId xmlns:p14="http://schemas.microsoft.com/office/powerpoint/2010/main" val="4023086353"/>
+        <p14:creationId xmlns:p14="http://schemas.microsoft.com/office/powerpoint/2010/main" val="2788832717"/>
       </p:ext>
     </p:extLst>
   </p:cSld>
@@ -5274,8 +4789,8 @@
         </p:nvSpPr>
         <p:spPr bwMode="auto">
           <a:xfrm rot="10800000" flipV="1">
-            <a:off x="785998" y="2422536"/>
-            <a:ext cx="10023566" cy="3108543"/>
+            <a:off x="990940" y="1742082"/>
+            <a:ext cx="10023566" cy="4524315"/>
           </a:xfrm>
           <a:prstGeom prst="rect">
             <a:avLst/>
@@ -5340,7 +4855,7 @@
               <a:tabLst/>
             </a:pPr>
             <a:r>
-              <a:rPr kumimoji="0" lang="en-US" altLang="en-US" sz="2800" b="0" i="0" u="none" strike="noStrike" cap="none" normalizeH="0" baseline="0" dirty="0">
+              <a:rPr kumimoji="0" lang="en-US" altLang="en-US" sz="3200" b="0" i="0" u="none" strike="noStrike" cap="none" normalizeH="0" baseline="0" dirty="0">
                 <a:ln>
                   <a:noFill/>
                 </a:ln>
@@ -5372,7 +4887,7 @@
               <a:tabLst/>
             </a:pPr>
             <a:r>
-              <a:rPr kumimoji="0" lang="en-US" altLang="en-US" sz="2800" b="0" i="0" u="none" strike="noStrike" cap="none" normalizeH="0" baseline="0" dirty="0">
+              <a:rPr kumimoji="0" lang="en-US" altLang="en-US" sz="3200" b="0" i="0" u="none" strike="noStrike" cap="none" normalizeH="0" baseline="0" dirty="0">
                 <a:ln>
                   <a:noFill/>
                 </a:ln>
@@ -5404,7 +4919,7 @@
               <a:tabLst/>
             </a:pPr>
             <a:r>
-              <a:rPr kumimoji="0" lang="en-US" altLang="en-US" sz="2800" b="0" i="0" u="none" strike="noStrike" cap="none" normalizeH="0" baseline="0" dirty="0">
+              <a:rPr kumimoji="0" lang="en-US" altLang="en-US" sz="3200" b="0" i="0" u="none" strike="noStrike" cap="none" normalizeH="0" baseline="0" dirty="0">
                 <a:ln>
                   <a:noFill/>
                 </a:ln>
@@ -5436,7 +4951,7 @@
               <a:tabLst/>
             </a:pPr>
             <a:r>
-              <a:rPr kumimoji="0" lang="en-US" altLang="en-US" sz="2800" b="0" i="0" u="none" strike="noStrike" cap="none" normalizeH="0" baseline="0" dirty="0">
+              <a:rPr kumimoji="0" lang="en-US" altLang="en-US" sz="3200" b="0" i="0" u="none" strike="noStrike" cap="none" normalizeH="0" baseline="0" dirty="0">
                 <a:ln>
                   <a:noFill/>
                 </a:ln>
@@ -5468,7 +4983,7 @@
               <a:tabLst/>
             </a:pPr>
             <a:r>
-              <a:rPr kumimoji="0" lang="en-US" altLang="en-US" sz="2800" b="0" i="0" u="none" strike="noStrike" cap="none" normalizeH="0" baseline="0" dirty="0">
+              <a:rPr kumimoji="0" lang="en-US" altLang="en-US" sz="3200" b="0" i="0" u="none" strike="noStrike" cap="none" normalizeH="0" baseline="0" dirty="0">
                 <a:ln>
                   <a:noFill/>
                 </a:ln>
@@ -5528,7 +5043,7 @@
         </p:nvSpPr>
         <p:spPr>
           <a:xfrm>
-            <a:off x="3870187" y="1060508"/>
+            <a:off x="4327387" y="850196"/>
             <a:ext cx="3588026" cy="646331"/>
           </a:xfrm>
           <a:prstGeom prst="rect">
@@ -5629,8 +5144,8 @@
         </p:nvSpPr>
         <p:spPr>
           <a:xfrm>
-            <a:off x="665922" y="2131405"/>
-            <a:ext cx="11186881" cy="3268652"/>
+            <a:off x="611058" y="1655917"/>
+            <a:ext cx="11186881" cy="4708981"/>
           </a:xfrm>
           <a:prstGeom prst="rect">
             <a:avLst/>
@@ -5644,44 +5159,75 @@
           <a:lstStyle/>
           <a:p>
             <a:pPr marL="342900" indent="-342900">
-              <a:lnSpc>
-                <a:spcPct val="150000"/>
-              </a:lnSpc>
               <a:buFont typeface="Arial" panose="020B0604020202020204" pitchFamily="34" charset="0"/>
               <a:buChar char="•"/>
             </a:pPr>
             <a:r>
+              <a:rPr lang="en-IN" sz="2000" dirty="0">
+                <a:latin typeface="Times New Roman" panose="02020603050405020304" pitchFamily="18" charset="0"/>
+                <a:cs typeface="Times New Roman" panose="02020603050405020304" pitchFamily="18" charset="0"/>
+              </a:rPr>
+              <a:t>[1] V. </a:t>
+            </a:r>
+            <a:r>
               <a:rPr lang="en-IN" sz="2000" dirty="0" err="1">
                 <a:latin typeface="Times New Roman" panose="02020603050405020304" pitchFamily="18" charset="0"/>
                 <a:cs typeface="Times New Roman" panose="02020603050405020304" pitchFamily="18" charset="0"/>
               </a:rPr>
-              <a:t>Qiao</a:t>
+              <a:t>Michalakopoulos</a:t>
             </a:r>
             <a:r>
               <a:rPr lang="en-IN" sz="2000" dirty="0">
                 <a:latin typeface="Times New Roman" panose="02020603050405020304" pitchFamily="18" charset="0"/>
                 <a:cs typeface="Times New Roman" panose="02020603050405020304" pitchFamily="18" charset="0"/>
               </a:rPr>
-              <a:t> et al. (2014), Event Recommendation in Event-Based Social Networks. </a:t>
+              <a:t> </a:t>
+            </a:r>
+            <a:r>
+              <a:rPr lang="en-IN" sz="2000" i="1" dirty="0">
+                <a:latin typeface="Times New Roman" panose="02020603050405020304" pitchFamily="18" charset="0"/>
+                <a:cs typeface="Times New Roman" panose="02020603050405020304" pitchFamily="18" charset="0"/>
+              </a:rPr>
+              <a:t>et al</a:t>
             </a:r>
             <a:r>
               <a:rPr lang="en-IN" sz="2000" dirty="0">
                 <a:latin typeface="Times New Roman" panose="02020603050405020304" pitchFamily="18" charset="0"/>
                 <a:cs typeface="Times New Roman" panose="02020603050405020304" pitchFamily="18" charset="0"/>
-                <a:hlinkClick r:id="rId4"/>
-              </a:rPr>
-              <a:t>Research Paper</a:t>
-            </a:r>
-            <a:endParaRPr lang="en-IN" sz="2000" dirty="0">
-              <a:latin typeface="Times New Roman" panose="02020603050405020304" pitchFamily="18" charset="0"/>
-              <a:cs typeface="Times New Roman" panose="02020603050405020304" pitchFamily="18" charset="0"/>
-            </a:endParaRPr>
+              </a:rPr>
+              <a:t>., “A machine learning-based framework for clustering residential electricity load profiles to enhance demand response programs,” </a:t>
+            </a:r>
+            <a:r>
+              <a:rPr lang="en-IN" sz="2000" i="1" dirty="0">
+                <a:latin typeface="Times New Roman" panose="02020603050405020304" pitchFamily="18" charset="0"/>
+                <a:cs typeface="Times New Roman" panose="02020603050405020304" pitchFamily="18" charset="0"/>
+              </a:rPr>
+              <a:t>Applied Energy</a:t>
+            </a:r>
+            <a:r>
+              <a:rPr lang="en-IN" sz="2000" dirty="0">
+                <a:latin typeface="Times New Roman" panose="02020603050405020304" pitchFamily="18" charset="0"/>
+                <a:cs typeface="Times New Roman" panose="02020603050405020304" pitchFamily="18" charset="0"/>
+              </a:rPr>
+              <a:t>, vol. 361, Art. no. 122943, 2024, </a:t>
+            </a:r>
+            <a:r>
+              <a:rPr lang="en-IN" sz="2000" dirty="0" err="1">
+                <a:latin typeface="Times New Roman" panose="02020603050405020304" pitchFamily="18" charset="0"/>
+                <a:cs typeface="Times New Roman" panose="02020603050405020304" pitchFamily="18" charset="0"/>
+              </a:rPr>
+              <a:t>doi</a:t>
+            </a:r>
+            <a:r>
+              <a:rPr lang="en-IN" sz="2000" dirty="0">
+                <a:latin typeface="Times New Roman" panose="02020603050405020304" pitchFamily="18" charset="0"/>
+                <a:cs typeface="Times New Roman" panose="02020603050405020304" pitchFamily="18" charset="0"/>
+              </a:rPr>
+              <a:t>: 10.1016/j.apenergy.2024.122943.</a:t>
+            </a:r>
           </a:p>
           <a:p>
             <a:pPr marL="342900" indent="-342900">
-              <a:lnSpc>
-                <a:spcPct val="150000"/>
-              </a:lnSpc>
               <a:buFont typeface="Arial" panose="020B0604020202020204" pitchFamily="34" charset="0"/>
               <a:buChar char="•"/>
             </a:pPr>
@@ -5690,40 +5236,53 @@
                 <a:latin typeface="Times New Roman" panose="02020603050405020304" pitchFamily="18" charset="0"/>
                 <a:cs typeface="Times New Roman" panose="02020603050405020304" pitchFamily="18" charset="0"/>
               </a:rPr>
-              <a:t>2. </a:t>
+              <a:t>[2] “Mining energy consumption </a:t>
             </a:r>
             <a:r>
               <a:rPr lang="en-IN" sz="2000" dirty="0" err="1">
                 <a:latin typeface="Times New Roman" panose="02020603050405020304" pitchFamily="18" charset="0"/>
                 <a:cs typeface="Times New Roman" panose="02020603050405020304" pitchFamily="18" charset="0"/>
               </a:rPr>
-              <a:t>Malinen</a:t>
+              <a:t>behavior</a:t>
             </a:r>
             <a:r>
               <a:rPr lang="en-IN" sz="2000" dirty="0">
                 <a:latin typeface="Times New Roman" panose="02020603050405020304" pitchFamily="18" charset="0"/>
                 <a:cs typeface="Times New Roman" panose="02020603050405020304" pitchFamily="18" charset="0"/>
               </a:rPr>
-              <a:t> (2015), Understanding User Participation in Online Communities. </a:t>
+              <a:t> patterns for households in smart grid,” </a:t>
+            </a:r>
+            <a:r>
+              <a:rPr lang="en-IN" sz="2000" i="1" dirty="0">
+                <a:latin typeface="Times New Roman" panose="02020603050405020304" pitchFamily="18" charset="0"/>
+                <a:cs typeface="Times New Roman" panose="02020603050405020304" pitchFamily="18" charset="0"/>
+              </a:rPr>
+              <a:t>IEEE Transactions on Emerging Topics in Computing</a:t>
             </a:r>
             <a:r>
               <a:rPr lang="en-IN" sz="2000" dirty="0">
                 <a:latin typeface="Times New Roman" panose="02020603050405020304" pitchFamily="18" charset="0"/>
                 <a:cs typeface="Times New Roman" panose="02020603050405020304" pitchFamily="18" charset="0"/>
-                <a:hlinkClick r:id="rId5"/>
-              </a:rPr>
-              <a:t>Research Paper</a:t>
-            </a:r>
-            <a:endParaRPr lang="en-IN" sz="2000" dirty="0">
-              <a:latin typeface="Times New Roman" panose="02020603050405020304" pitchFamily="18" charset="0"/>
-              <a:cs typeface="Times New Roman" panose="02020603050405020304" pitchFamily="18" charset="0"/>
-            </a:endParaRPr>
+              </a:rPr>
+              <a:t>, vol. 7, no. 3, pp. 404–419, 2019, </a:t>
+            </a:r>
+            <a:r>
+              <a:rPr lang="en-IN" sz="2000" dirty="0" err="1">
+                <a:latin typeface="Times New Roman" panose="02020603050405020304" pitchFamily="18" charset="0"/>
+                <a:cs typeface="Times New Roman" panose="02020603050405020304" pitchFamily="18" charset="0"/>
+              </a:rPr>
+              <a:t>doi</a:t>
+            </a:r>
+            <a:r>
+              <a:rPr lang="en-IN" sz="2000" dirty="0">
+                <a:latin typeface="Times New Roman" panose="02020603050405020304" pitchFamily="18" charset="0"/>
+                <a:cs typeface="Times New Roman" panose="02020603050405020304" pitchFamily="18" charset="0"/>
+              </a:rPr>
+              <a:t>: 10.1109/TETC.2017.2692098.</a:t>
+            </a:r>
           </a:p>
           <a:p>
             <a:pPr marL="342900" indent="-342900">
-              <a:lnSpc>
-                <a:spcPct val="150000"/>
-              </a:lnSpc>
               <a:buFont typeface="Arial" panose="020B0604020202020204" pitchFamily="34" charset="0"/>
               <a:buChar char="•"/>
             </a:pPr>
@@ -5732,26 +5291,53 @@
                 <a:latin typeface="Times New Roman" panose="02020603050405020304" pitchFamily="18" charset="0"/>
                 <a:cs typeface="Times New Roman" panose="02020603050405020304" pitchFamily="18" charset="0"/>
               </a:rPr>
-              <a:t>3. Chen and Sun (2016), Social Event Recommendations. </a:t>
+              <a:t>[3] F. Wang </a:t>
+            </a:r>
+            <a:r>
+              <a:rPr lang="en-IN" sz="2000" i="1" dirty="0">
+                <a:latin typeface="Times New Roman" panose="02020603050405020304" pitchFamily="18" charset="0"/>
+                <a:cs typeface="Times New Roman" panose="02020603050405020304" pitchFamily="18" charset="0"/>
+              </a:rPr>
+              <a:t>et al</a:t>
             </a:r>
             <a:r>
               <a:rPr lang="en-IN" sz="2000" dirty="0">
                 <a:latin typeface="Times New Roman" panose="02020603050405020304" pitchFamily="18" charset="0"/>
                 <a:cs typeface="Times New Roman" panose="02020603050405020304" pitchFamily="18" charset="0"/>
-                <a:hlinkClick r:id="rId6"/>
-              </a:rPr>
-              <a:t>Research Paper</a:t>
-            </a:r>
-            <a:endParaRPr lang="en-IN" sz="2000" dirty="0">
-              <a:latin typeface="Times New Roman" panose="02020603050405020304" pitchFamily="18" charset="0"/>
-              <a:cs typeface="Times New Roman" panose="02020603050405020304" pitchFamily="18" charset="0"/>
-            </a:endParaRPr>
+              </a:rPr>
+              <a:t>., “Association rule mining based quantitative analysis approach of household characteristics impacts on residential electricity consumption patterns,” </a:t>
+            </a:r>
+            <a:r>
+              <a:rPr lang="en-IN" sz="2000" i="1" dirty="0">
+                <a:latin typeface="Times New Roman" panose="02020603050405020304" pitchFamily="18" charset="0"/>
+                <a:cs typeface="Times New Roman" panose="02020603050405020304" pitchFamily="18" charset="0"/>
+              </a:rPr>
+              <a:t>Energy Conversion and Management</a:t>
+            </a:r>
+            <a:r>
+              <a:rPr lang="en-IN" sz="2000" dirty="0">
+                <a:latin typeface="Times New Roman" panose="02020603050405020304" pitchFamily="18" charset="0"/>
+                <a:cs typeface="Times New Roman" panose="02020603050405020304" pitchFamily="18" charset="0"/>
+              </a:rPr>
+              <a:t>, vol. 171, pp. 839–854, 2018, </a:t>
+            </a:r>
+            <a:r>
+              <a:rPr lang="en-IN" sz="2000" dirty="0" err="1">
+                <a:latin typeface="Times New Roman" panose="02020603050405020304" pitchFamily="18" charset="0"/>
+                <a:cs typeface="Times New Roman" panose="02020603050405020304" pitchFamily="18" charset="0"/>
+              </a:rPr>
+              <a:t>doi</a:t>
+            </a:r>
+            <a:r>
+              <a:rPr lang="en-IN" sz="2000" dirty="0">
+                <a:latin typeface="Times New Roman" panose="02020603050405020304" pitchFamily="18" charset="0"/>
+                <a:cs typeface="Times New Roman" panose="02020603050405020304" pitchFamily="18" charset="0"/>
+              </a:rPr>
+              <a:t>: 10.1016/j.enconman.2018.06.017.</a:t>
+            </a:r>
           </a:p>
           <a:p>
             <a:pPr marL="342900" indent="-342900">
-              <a:lnSpc>
-                <a:spcPct val="150000"/>
-              </a:lnSpc>
               <a:buFont typeface="Arial" panose="020B0604020202020204" pitchFamily="34" charset="0"/>
               <a:buChar char="•"/>
             </a:pPr>
@@ -5760,26 +5346,39 @@
                 <a:latin typeface="Times New Roman" panose="02020603050405020304" pitchFamily="18" charset="0"/>
                 <a:cs typeface="Times New Roman" panose="02020603050405020304" pitchFamily="18" charset="0"/>
               </a:rPr>
-              <a:t>4. Huang et al. (2020), Context-Aware Recommendation in Event-Based Social Networks. </a:t>
+              <a:t>[4] “Data-driven resource planning for virtual power plant integrating demand response customer selection and storage,” </a:t>
+            </a:r>
+            <a:r>
+              <a:rPr lang="en-IN" sz="2000" i="1" dirty="0">
+                <a:latin typeface="Times New Roman" panose="02020603050405020304" pitchFamily="18" charset="0"/>
+                <a:cs typeface="Times New Roman" panose="02020603050405020304" pitchFamily="18" charset="0"/>
+              </a:rPr>
+              <a:t>IEEE Transactions on Industrial Informatics</a:t>
             </a:r>
             <a:r>
               <a:rPr lang="en-IN" sz="2000" dirty="0">
                 <a:latin typeface="Times New Roman" panose="02020603050405020304" pitchFamily="18" charset="0"/>
                 <a:cs typeface="Times New Roman" panose="02020603050405020304" pitchFamily="18" charset="0"/>
-                <a:hlinkClick r:id="rId7"/>
-              </a:rPr>
-              <a:t>Research Paper</a:t>
-            </a:r>
-            <a:endParaRPr lang="en-IN" sz="2000" dirty="0">
-              <a:latin typeface="Times New Roman" panose="02020603050405020304" pitchFamily="18" charset="0"/>
-              <a:cs typeface="Times New Roman" panose="02020603050405020304" pitchFamily="18" charset="0"/>
-            </a:endParaRPr>
+              </a:rPr>
+              <a:t>, vol. 18, no. 3, pp. 1833–1844, 2022, </a:t>
+            </a:r>
+            <a:r>
+              <a:rPr lang="en-IN" sz="2000" dirty="0" err="1">
+                <a:latin typeface="Times New Roman" panose="02020603050405020304" pitchFamily="18" charset="0"/>
+                <a:cs typeface="Times New Roman" panose="02020603050405020304" pitchFamily="18" charset="0"/>
+              </a:rPr>
+              <a:t>doi</a:t>
+            </a:r>
+            <a:r>
+              <a:rPr lang="en-IN" sz="2000" dirty="0">
+                <a:latin typeface="Times New Roman" panose="02020603050405020304" pitchFamily="18" charset="0"/>
+                <a:cs typeface="Times New Roman" panose="02020603050405020304" pitchFamily="18" charset="0"/>
+              </a:rPr>
+              <a:t>: 10.1109/TII.2021.3068402.</a:t>
+            </a:r>
           </a:p>
           <a:p>
             <a:pPr marL="342900" indent="-342900">
-              <a:lnSpc>
-                <a:spcPct val="150000"/>
-              </a:lnSpc>
               <a:buFont typeface="Arial" panose="020B0604020202020204" pitchFamily="34" charset="0"/>
               <a:buChar char="•"/>
             </a:pPr>
@@ -5788,26 +5387,39 @@
                 <a:latin typeface="Times New Roman" panose="02020603050405020304" pitchFamily="18" charset="0"/>
                 <a:cs typeface="Times New Roman" panose="02020603050405020304" pitchFamily="18" charset="0"/>
               </a:rPr>
-              <a:t>5. Jiang et al. (2023), Event-Based Group Recommendation. </a:t>
+              <a:t>[5] “Smart meters time series clustering for demand response applications in the context of high penetration of renewable energy resources,” </a:t>
+            </a:r>
+            <a:r>
+              <a:rPr lang="en-IN" sz="2000" i="1" dirty="0">
+                <a:latin typeface="Times New Roman" panose="02020603050405020304" pitchFamily="18" charset="0"/>
+                <a:cs typeface="Times New Roman" panose="02020603050405020304" pitchFamily="18" charset="0"/>
+              </a:rPr>
+              <a:t>Energies</a:t>
             </a:r>
             <a:r>
               <a:rPr lang="en-IN" sz="2000" dirty="0">
                 <a:latin typeface="Times New Roman" panose="02020603050405020304" pitchFamily="18" charset="0"/>
                 <a:cs typeface="Times New Roman" panose="02020603050405020304" pitchFamily="18" charset="0"/>
-                <a:hlinkClick r:id="rId8"/>
-              </a:rPr>
-              <a:t>Research Paper</a:t>
-            </a:r>
-            <a:endParaRPr lang="en-IN" sz="2000" dirty="0">
-              <a:latin typeface="Times New Roman" panose="02020603050405020304" pitchFamily="18" charset="0"/>
-              <a:cs typeface="Times New Roman" panose="02020603050405020304" pitchFamily="18" charset="0"/>
-            </a:endParaRPr>
-          </a:p>
-          <a:p>
-            <a:pPr marL="342900" indent="-342900" algn="just">
-              <a:lnSpc>
-                <a:spcPct val="150000"/>
-              </a:lnSpc>
+              </a:rPr>
+              <a:t>, vol. 14, no. 12, Art. no. 3458, 2021, </a:t>
+            </a:r>
+            <a:r>
+              <a:rPr lang="en-IN" sz="2000" dirty="0" err="1">
+                <a:latin typeface="Times New Roman" panose="02020603050405020304" pitchFamily="18" charset="0"/>
+                <a:cs typeface="Times New Roman" panose="02020603050405020304" pitchFamily="18" charset="0"/>
+              </a:rPr>
+              <a:t>doi</a:t>
+            </a:r>
+            <a:r>
+              <a:rPr lang="en-IN" sz="2000" dirty="0">
+                <a:latin typeface="Times New Roman" panose="02020603050405020304" pitchFamily="18" charset="0"/>
+                <a:cs typeface="Times New Roman" panose="02020603050405020304" pitchFamily="18" charset="0"/>
+              </a:rPr>
+              <a:t>: 10.3390/en14123458.</a:t>
+            </a:r>
+          </a:p>
+          <a:p>
+            <a:pPr marL="342900" indent="-342900">
               <a:buFont typeface="Arial" panose="020B0604020202020204" pitchFamily="34" charset="0"/>
               <a:buChar char="•"/>
             </a:pPr>
@@ -5977,8 +5589,8 @@
         </p:nvSpPr>
         <p:spPr bwMode="auto">
           <a:xfrm>
-            <a:off x="564356" y="1071550"/>
-            <a:ext cx="11063288" cy="5453865"/>
+            <a:off x="564356" y="1699702"/>
+            <a:ext cx="11063288" cy="4197559"/>
           </a:xfrm>
           <a:prstGeom prst="rect">
             <a:avLst/>
@@ -6043,7 +5655,10 @@
               <a:tabLst/>
             </a:pPr>
             <a:r>
-              <a:rPr lang="en-US" altLang="en-US" sz="1800" dirty="0"/>
+              <a:rPr lang="en-US" altLang="en-US" sz="1800" dirty="0">
+                <a:latin typeface="Times New Roman" panose="02020603050405020304" pitchFamily="18" charset="0"/>
+                <a:cs typeface="Times New Roman" panose="02020603050405020304" pitchFamily="18" charset="0"/>
+              </a:rPr>
               <a:t>Sustainability Intelligence is a data-driven web application designed to analyze household electricity consumption and promote sustainable energy usage.</a:t>
             </a:r>
           </a:p>
@@ -6065,7 +5680,10 @@
               <a:tabLst/>
             </a:pPr>
             <a:r>
-              <a:rPr lang="en-US" altLang="en-US" sz="1800" dirty="0"/>
+              <a:rPr lang="en-US" altLang="en-US" sz="1800" dirty="0">
+                <a:latin typeface="Times New Roman" panose="02020603050405020304" pitchFamily="18" charset="0"/>
+                <a:cs typeface="Times New Roman" panose="02020603050405020304" pitchFamily="18" charset="0"/>
+              </a:rPr>
               <a:t>Integrates smart meter readings, household information, weather data, and holiday records into a structured data warehouse.</a:t>
             </a:r>
           </a:p>
@@ -6087,7 +5705,10 @@
               <a:tabLst/>
             </a:pPr>
             <a:r>
-              <a:rPr lang="en-US" altLang="en-US" sz="1800" dirty="0"/>
+              <a:rPr lang="en-US" altLang="en-US" sz="1800" dirty="0">
+                <a:latin typeface="Times New Roman" panose="02020603050405020304" pitchFamily="18" charset="0"/>
+                <a:cs typeface="Times New Roman" panose="02020603050405020304" pitchFamily="18" charset="0"/>
+              </a:rPr>
               <a:t>Uses K-Means clustering and DBSCAN to identify consumption patterns and detect unusual electricity usage.</a:t>
             </a:r>
           </a:p>
@@ -6109,7 +5730,10 @@
               <a:tabLst/>
             </a:pPr>
             <a:r>
-              <a:rPr lang="en-US" altLang="en-US" sz="1800" dirty="0"/>
+              <a:rPr lang="en-US" altLang="en-US" sz="1800" dirty="0">
+                <a:latin typeface="Times New Roman" panose="02020603050405020304" pitchFamily="18" charset="0"/>
+                <a:cs typeface="Times New Roman" panose="02020603050405020304" pitchFamily="18" charset="0"/>
+              </a:rPr>
               <a:t>Applies association rule mining to discover relationships between electricity consumption and contextual factors.</a:t>
             </a:r>
           </a:p>
@@ -6131,8 +5755,11 @@
               <a:tabLst/>
             </a:pPr>
             <a:r>
-              <a:rPr lang="en-US" altLang="en-US" sz="1800" dirty="0"/>
-              <a:t>Provides an interactive dashboard to visualize consumption trends, household clusters, and data quality metrics.</a:t>
+              <a:rPr lang="en-US" altLang="en-US" sz="1800" dirty="0">
+                <a:latin typeface="Times New Roman" panose="02020603050405020304" pitchFamily="18" charset="0"/>
+                <a:cs typeface="Times New Roman" panose="02020603050405020304" pitchFamily="18" charset="0"/>
+              </a:rPr>
+              <a:t>Estimates potential electricity savings and CO₂ emission reductions through what-if analysis.</a:t>
             </a:r>
           </a:p>
           <a:p>
@@ -6153,8 +5780,11 @@
               <a:tabLst/>
             </a:pPr>
             <a:r>
-              <a:rPr lang="en-US" altLang="en-US" sz="1800" dirty="0"/>
-              <a:t>Estimates potential electricity savings and CO₂ emission reductions through what-if analysis.</a:t>
+              <a:rPr lang="en-US" altLang="en-US" sz="1800" dirty="0">
+                <a:latin typeface="Times New Roman" panose="02020603050405020304" pitchFamily="18" charset="0"/>
+                <a:cs typeface="Times New Roman" panose="02020603050405020304" pitchFamily="18" charset="0"/>
+              </a:rPr>
+              <a:t>Generates evidence-based energy-saving recommendations using a knowledge retrieval system.</a:t>
             </a:r>
           </a:p>
           <a:p>
@@ -6175,29 +5805,10 @@
               <a:tabLst/>
             </a:pPr>
             <a:r>
-              <a:rPr lang="en-US" altLang="en-US" sz="1800" dirty="0"/>
-              <a:t>Generates evidence-based energy-saving recommendations using a knowledge retrieval system.</a:t>
-            </a:r>
-          </a:p>
-          <a:p>
-            <a:pPr marL="0" marR="0" lvl="0" indent="0" algn="l" defTabSz="914400" rtl="0" eaLnBrk="0" fontAlgn="base" latinLnBrk="0" hangingPunct="0">
-              <a:lnSpc>
-                <a:spcPct val="150000"/>
-              </a:lnSpc>
-              <a:spcBef>
-                <a:spcPct val="0"/>
-              </a:spcBef>
-              <a:spcAft>
-                <a:spcPct val="0"/>
-              </a:spcAft>
-              <a:buClrTx/>
-              <a:buSzTx/>
-              <a:buFontTx/>
-              <a:buChar char="•"/>
-              <a:tabLst/>
-            </a:pPr>
-            <a:r>
-              <a:rPr lang="en-US" altLang="en-US" sz="1800" dirty="0"/>
+              <a:rPr lang="en-US" altLang="en-US" sz="1800" dirty="0">
+                <a:latin typeface="Times New Roman" panose="02020603050405020304" pitchFamily="18" charset="0"/>
+                <a:cs typeface="Times New Roman" panose="02020603050405020304" pitchFamily="18" charset="0"/>
+              </a:rPr>
               <a:t>Supports SDG 7, SDG 11, SDG 12, and SDG 13 by encouraging energy efficiency and responsible resource consumption.</a:t>
             </a:r>
           </a:p>
@@ -6221,253 +5832,10 @@
   <p:cSld>
     <p:spTree>
       <p:nvGrpSpPr>
-        <p:cNvPr id="1" name=""/>
-        <p:cNvGrpSpPr/>
-        <p:nvPr/>
-      </p:nvGrpSpPr>
-      <p:grpSpPr>
-        <a:xfrm>
-          <a:off x="0" y="0"/>
-          <a:ext cx="0" cy="0"/>
-          <a:chOff x="0" y="0"/>
-          <a:chExt cx="0" cy="0"/>
-        </a:xfrm>
-      </p:grpSpPr>
-      <p:pic>
-        <p:nvPicPr>
-          <p:cNvPr id="6" name="object 3">
-            <a:extLst>
-              <a:ext uri="{FF2B5EF4-FFF2-40B4-BE49-F238E27FC236}">
-                <a16:creationId xmlns:a16="http://schemas.microsoft.com/office/drawing/2014/main" id="{E2CF6C8C-3B52-C65C-D16C-825BDDE64493}"/>
-              </a:ext>
-            </a:extLst>
-          </p:cNvPr>
-          <p:cNvPicPr/>
-          <p:nvPr/>
-        </p:nvPicPr>
-        <p:blipFill>
-          <a:blip r:embed="rId2" cstate="print"/>
-          <a:stretch>
-            <a:fillRect/>
-          </a:stretch>
-        </p:blipFill>
-        <p:spPr>
-          <a:xfrm>
-            <a:off x="225851" y="143932"/>
-            <a:ext cx="822923" cy="914400"/>
-          </a:xfrm>
-          <a:prstGeom prst="rect">
-            <a:avLst/>
-          </a:prstGeom>
-        </p:spPr>
-      </p:pic>
-      <p:pic>
-        <p:nvPicPr>
-          <p:cNvPr id="7" name="object 4">
-            <a:extLst>
-              <a:ext uri="{FF2B5EF4-FFF2-40B4-BE49-F238E27FC236}">
-                <a16:creationId xmlns:a16="http://schemas.microsoft.com/office/drawing/2014/main" id="{1558F026-9386-0E28-9F04-077F9A905E5C}"/>
-              </a:ext>
-            </a:extLst>
-          </p:cNvPr>
-          <p:cNvPicPr/>
-          <p:nvPr/>
-        </p:nvPicPr>
-        <p:blipFill>
-          <a:blip r:embed="rId3" cstate="print"/>
-          <a:stretch>
-            <a:fillRect/>
-          </a:stretch>
-        </p:blipFill>
-        <p:spPr>
-          <a:xfrm>
-            <a:off x="10831033" y="308745"/>
-            <a:ext cx="1135116" cy="914400"/>
-          </a:xfrm>
-          <a:prstGeom prst="rect">
-            <a:avLst/>
-          </a:prstGeom>
-        </p:spPr>
-      </p:pic>
-      <p:sp>
-        <p:nvSpPr>
-          <p:cNvPr id="2" name="TextBox 1">
-            <a:extLst>
-              <a:ext uri="{FF2B5EF4-FFF2-40B4-BE49-F238E27FC236}">
-                <a16:creationId xmlns:a16="http://schemas.microsoft.com/office/drawing/2014/main" id="{365CF1C4-F100-1349-F04F-136BAE326DAE}"/>
-              </a:ext>
-            </a:extLst>
-          </p:cNvPr>
-          <p:cNvSpPr txBox="1"/>
-          <p:nvPr/>
-        </p:nvSpPr>
-        <p:spPr>
-          <a:xfrm>
-            <a:off x="4431317" y="765945"/>
-            <a:ext cx="2805255" cy="646331"/>
-          </a:xfrm>
-          <a:prstGeom prst="rect">
-            <a:avLst/>
-          </a:prstGeom>
-          <a:noFill/>
-        </p:spPr>
-        <p:txBody>
-          <a:bodyPr wrap="none" rtlCol="0">
-            <a:spAutoFit/>
-          </a:bodyPr>
-          <a:lstStyle/>
-          <a:p>
-            <a:r>
-              <a:rPr lang="en-IN" sz="3600" b="1" dirty="0">
-                <a:solidFill>
-                  <a:srgbClr val="C00000"/>
-                </a:solidFill>
-                <a:latin typeface="Times New Roman" panose="02020603050405020304" pitchFamily="18" charset="0"/>
-                <a:cs typeface="Times New Roman" panose="02020603050405020304" pitchFamily="18" charset="0"/>
-              </a:rPr>
-              <a:t>Introduction</a:t>
-            </a:r>
-            <a:r>
-              <a:rPr lang="en-IN" sz="3600" b="1" dirty="0">
-                <a:latin typeface="Times New Roman" panose="02020603050405020304" pitchFamily="18" charset="0"/>
-                <a:cs typeface="Times New Roman" panose="02020603050405020304" pitchFamily="18" charset="0"/>
-              </a:rPr>
-              <a:t> </a:t>
-            </a:r>
-          </a:p>
-        </p:txBody>
-      </p:sp>
-      <p:sp>
-        <p:nvSpPr>
-          <p:cNvPr id="3" name="TextBox 2">
-            <a:extLst>
-              <a:ext uri="{FF2B5EF4-FFF2-40B4-BE49-F238E27FC236}">
-                <a16:creationId xmlns:a16="http://schemas.microsoft.com/office/drawing/2014/main" id="{D8EFFF3E-D1C8-D397-2C55-5013AFFA8AA1}"/>
-              </a:ext>
-            </a:extLst>
-          </p:cNvPr>
-          <p:cNvSpPr txBox="1"/>
-          <p:nvPr/>
-        </p:nvSpPr>
-        <p:spPr>
-          <a:xfrm>
-            <a:off x="637312" y="1700142"/>
-            <a:ext cx="9899374" cy="4191981"/>
-          </a:xfrm>
-          <a:prstGeom prst="rect">
-            <a:avLst/>
-          </a:prstGeom>
-          <a:noFill/>
-        </p:spPr>
-        <p:txBody>
-          <a:bodyPr wrap="square" rtlCol="0">
-            <a:spAutoFit/>
-          </a:bodyPr>
-          <a:lstStyle/>
-          <a:p>
-            <a:pPr marL="342900" indent="-342900">
-              <a:lnSpc>
-                <a:spcPct val="150000"/>
-              </a:lnSpc>
-              <a:buFont typeface="Arial" panose="020B0604020202020204" pitchFamily="34" charset="0"/>
-              <a:buChar char="•"/>
-            </a:pPr>
-            <a:r>
-              <a:rPr lang="en-US" sz="2000" dirty="0">
-                <a:latin typeface="Times New Roman" panose="02020603050405020304" pitchFamily="18" charset="0"/>
-                <a:cs typeface="Times New Roman" panose="02020603050405020304" pitchFamily="18" charset="0"/>
-              </a:rPr>
-              <a:t>Household electricity consumption plays a significant role in energy sustainability and carbon emissions.</a:t>
-            </a:r>
-          </a:p>
-          <a:p>
-            <a:pPr marL="342900" indent="-342900">
-              <a:lnSpc>
-                <a:spcPct val="150000"/>
-              </a:lnSpc>
-              <a:buFont typeface="Arial" panose="020B0604020202020204" pitchFamily="34" charset="0"/>
-              <a:buChar char="•"/>
-            </a:pPr>
-            <a:r>
-              <a:rPr lang="en-US" sz="2000" dirty="0">
-                <a:latin typeface="Times New Roman" panose="02020603050405020304" pitchFamily="18" charset="0"/>
-                <a:cs typeface="Times New Roman" panose="02020603050405020304" pitchFamily="18" charset="0"/>
-              </a:rPr>
-              <a:t>Smart meters generate large amounts of data that can reveal valuable consumption patterns.</a:t>
-            </a:r>
-          </a:p>
-          <a:p>
-            <a:pPr marL="342900" indent="-342900">
-              <a:lnSpc>
-                <a:spcPct val="150000"/>
-              </a:lnSpc>
-              <a:buFont typeface="Arial" panose="020B0604020202020204" pitchFamily="34" charset="0"/>
-              <a:buChar char="•"/>
-            </a:pPr>
-            <a:r>
-              <a:rPr lang="en-US" sz="2000" dirty="0">
-                <a:latin typeface="Times New Roman" panose="02020603050405020304" pitchFamily="18" charset="0"/>
-                <a:cs typeface="Times New Roman" panose="02020603050405020304" pitchFamily="18" charset="0"/>
-              </a:rPr>
-              <a:t>Traditional monitoring methods provide limited insights into unusual usage and energy-saving opportunities.</a:t>
-            </a:r>
-          </a:p>
-          <a:p>
-            <a:pPr marL="342900" indent="-342900">
-              <a:lnSpc>
-                <a:spcPct val="150000"/>
-              </a:lnSpc>
-              <a:buFont typeface="Arial" panose="020B0604020202020204" pitchFamily="34" charset="0"/>
-              <a:buChar char="•"/>
-            </a:pPr>
-            <a:r>
-              <a:rPr lang="en-US" sz="2000" dirty="0">
-                <a:latin typeface="Times New Roman" panose="02020603050405020304" pitchFamily="18" charset="0"/>
-                <a:cs typeface="Times New Roman" panose="02020603050405020304" pitchFamily="18" charset="0"/>
-              </a:rPr>
-              <a:t>Sustainability Intelligence uses data warehousing and data mining techniques to analyze electricity consumption.</a:t>
-            </a:r>
-          </a:p>
-          <a:p>
-            <a:pPr marL="342900" indent="-342900">
-              <a:lnSpc>
-                <a:spcPct val="150000"/>
-              </a:lnSpc>
-              <a:buFont typeface="Arial" panose="020B0604020202020204" pitchFamily="34" charset="0"/>
-              <a:buChar char="•"/>
-            </a:pPr>
-            <a:r>
-              <a:rPr lang="en-US" sz="2000" dirty="0">
-                <a:latin typeface="Times New Roman" panose="02020603050405020304" pitchFamily="18" charset="0"/>
-                <a:cs typeface="Times New Roman" panose="02020603050405020304" pitchFamily="18" charset="0"/>
-              </a:rPr>
-              <a:t>An interactive dashboard provides actionable recommendations to improve energy efficiency and promote sustainable living.</a:t>
-            </a:r>
-          </a:p>
-        </p:txBody>
-      </p:sp>
-    </p:spTree>
-    <p:extLst>
-      <p:ext uri="{BB962C8B-B14F-4D97-AF65-F5344CB8AC3E}">
-        <p14:creationId xmlns:p14="http://schemas.microsoft.com/office/powerpoint/2010/main" val="1116747520"/>
-      </p:ext>
-    </p:extLst>
-  </p:cSld>
-  <p:clrMapOvr>
-    <a:masterClrMapping/>
-  </p:clrMapOvr>
-</p:sld>
-</file>
-
-<file path=ppt/slides/slide4.xml><?xml version="1.0" encoding="utf-8"?>
-<p:sld xmlns:a="http://schemas.openxmlformats.org/drawingml/2006/main" xmlns:r="http://schemas.openxmlformats.org/officeDocument/2006/relationships" xmlns:p="http://schemas.openxmlformats.org/presentationml/2006/main">
-  <p:cSld>
-    <p:spTree>
-      <p:nvGrpSpPr>
         <p:cNvPr id="1" name="">
           <a:extLst>
             <a:ext uri="{FF2B5EF4-FFF2-40B4-BE49-F238E27FC236}">
-              <a16:creationId xmlns:a16="http://schemas.microsoft.com/office/drawing/2014/main" id="{F2884AC9-0B8F-306D-5208-D61ECFD18C56}"/>
+              <a16:creationId xmlns:a16="http://schemas.microsoft.com/office/drawing/2014/main" id="{49E0FDBF-D87A-CDB4-C043-1101185D54CE}"/>
             </a:ext>
           </a:extLst>
         </p:cNvPr>
@@ -6482,99 +5850,44 @@
           <a:chExt cx="0" cy="0"/>
         </a:xfrm>
       </p:grpSpPr>
-      <p:pic>
-        <p:nvPicPr>
-          <p:cNvPr id="6" name="object 3">
-            <a:extLst>
-              <a:ext uri="{FF2B5EF4-FFF2-40B4-BE49-F238E27FC236}">
-                <a16:creationId xmlns:a16="http://schemas.microsoft.com/office/drawing/2014/main" id="{8EAB119B-919C-6F85-00E1-BE56AA7410E3}"/>
-              </a:ext>
-            </a:extLst>
-          </p:cNvPr>
-          <p:cNvPicPr/>
-          <p:nvPr/>
-        </p:nvPicPr>
-        <p:blipFill>
-          <a:blip r:embed="rId2" cstate="print"/>
-          <a:stretch>
-            <a:fillRect/>
-          </a:stretch>
-        </p:blipFill>
+      <p:sp>
+        <p:nvSpPr>
+          <p:cNvPr id="2" name="Title 1">
+            <a:extLst>
+              <a:ext uri="{FF2B5EF4-FFF2-40B4-BE49-F238E27FC236}">
+                <a16:creationId xmlns:a16="http://schemas.microsoft.com/office/drawing/2014/main" id="{281F254E-15ED-6331-7829-B920778270FB}"/>
+              </a:ext>
+            </a:extLst>
+          </p:cNvPr>
+          <p:cNvSpPr>
+            <a:spLocks noGrp="1"/>
+          </p:cNvSpPr>
+          <p:nvPr>
+            <p:ph type="title"/>
+          </p:nvPr>
+        </p:nvSpPr>
         <p:spPr>
           <a:xfrm>
-            <a:off x="225851" y="143932"/>
-            <a:ext cx="822923" cy="914400"/>
+            <a:off x="838200" y="273685"/>
+            <a:ext cx="10515600" cy="1325563"/>
           </a:xfrm>
-          <a:prstGeom prst="rect">
-            <a:avLst/>
-          </a:prstGeom>
         </p:spPr>
-      </p:pic>
-      <p:pic>
-        <p:nvPicPr>
-          <p:cNvPr id="7" name="object 4">
-            <a:extLst>
-              <a:ext uri="{FF2B5EF4-FFF2-40B4-BE49-F238E27FC236}">
-                <a16:creationId xmlns:a16="http://schemas.microsoft.com/office/drawing/2014/main" id="{2E876DE2-0AE6-24C8-CA85-2167CACF23D0}"/>
-              </a:ext>
-            </a:extLst>
-          </p:cNvPr>
-          <p:cNvPicPr/>
-          <p:nvPr/>
-        </p:nvPicPr>
-        <p:blipFill>
-          <a:blip r:embed="rId3" cstate="print"/>
-          <a:stretch>
-            <a:fillRect/>
-          </a:stretch>
-        </p:blipFill>
-        <p:spPr>
-          <a:xfrm>
-            <a:off x="10831033" y="288867"/>
-            <a:ext cx="1135116" cy="914400"/>
-          </a:xfrm>
-          <a:prstGeom prst="rect">
-            <a:avLst/>
-          </a:prstGeom>
-        </p:spPr>
-      </p:pic>
-      <p:sp>
-        <p:nvSpPr>
-          <p:cNvPr id="2" name="TextBox 1">
-            <a:extLst>
-              <a:ext uri="{FF2B5EF4-FFF2-40B4-BE49-F238E27FC236}">
-                <a16:creationId xmlns:a16="http://schemas.microsoft.com/office/drawing/2014/main" id="{BA52A1C2-F91B-E505-F823-EB2E8268B116}"/>
-              </a:ext>
-            </a:extLst>
-          </p:cNvPr>
-          <p:cNvSpPr txBox="1"/>
-          <p:nvPr/>
-        </p:nvSpPr>
-        <p:spPr>
-          <a:xfrm>
-            <a:off x="4218925" y="976805"/>
-            <a:ext cx="2159566" cy="646331"/>
-          </a:xfrm>
-          <a:prstGeom prst="rect">
-            <a:avLst/>
-          </a:prstGeom>
-          <a:noFill/>
-        </p:spPr>
-        <p:txBody>
-          <a:bodyPr wrap="none" rtlCol="0">
-            <a:spAutoFit/>
+        <p:txBody>
+          <a:bodyPr>
+            <a:normAutofit/>
           </a:bodyPr>
           <a:lstStyle/>
           <a:p>
-            <a:r>
-              <a:rPr lang="en-IN" sz="3600" dirty="0">
+            <a:pPr algn="ctr"/>
+            <a:r>
+              <a:rPr lang="en-US" sz="3600" b="1" dirty="0">
                 <a:solidFill>
                   <a:srgbClr val="C00000"/>
                 </a:solidFill>
                 <a:latin typeface="Times New Roman" panose="02020603050405020304" pitchFamily="18" charset="0"/>
                 <a:cs typeface="Times New Roman" panose="02020603050405020304" pitchFamily="18" charset="0"/>
               </a:rPr>
-              <a:t>Objectives</a:t>
+              <a:t>SDG Goals</a:t>
             </a:r>
             <a:endParaRPr lang="en-IN" sz="3600" b="1" dirty="0">
               <a:solidFill>
@@ -6588,22 +5901,24 @@
       </p:sp>
       <p:sp>
         <p:nvSpPr>
-          <p:cNvPr id="3" name="Rectangle 1">
-            <a:extLst>
-              <a:ext uri="{FF2B5EF4-FFF2-40B4-BE49-F238E27FC236}">
-                <a16:creationId xmlns:a16="http://schemas.microsoft.com/office/drawing/2014/main" id="{B86B1F29-7C20-D6F8-B788-840554364448}"/>
+          <p:cNvPr id="4" name="Rectangle 1">
+            <a:extLst>
+              <a:ext uri="{FF2B5EF4-FFF2-40B4-BE49-F238E27FC236}">
+                <a16:creationId xmlns:a16="http://schemas.microsoft.com/office/drawing/2014/main" id="{B8E61C1D-9AC7-65EE-9E22-73CCF3F407F4}"/>
               </a:ext>
             </a:extLst>
           </p:cNvPr>
           <p:cNvSpPr>
-            <a:spLocks noChangeArrowheads="1"/>
+            <a:spLocks noGrp="1" noChangeArrowheads="1"/>
           </p:cNvSpPr>
-          <p:nvPr/>
+          <p:nvPr>
+            <p:ph idx="1"/>
+          </p:nvPr>
         </p:nvSpPr>
         <p:spPr bwMode="auto">
           <a:xfrm>
-            <a:off x="408713" y="1342551"/>
-            <a:ext cx="7327112" cy="4653646"/>
+            <a:off x="564356" y="1292507"/>
+            <a:ext cx="11063288" cy="5011949"/>
           </a:xfrm>
           <a:prstGeom prst="rect">
             <a:avLst/>
@@ -6651,6 +5966,555 @@
           </a:bodyPr>
           <a:lstStyle/>
           <a:p>
+            <a:pPr marL="0" marR="0" lvl="0" indent="0" algn="l" defTabSz="914400" rtl="0" eaLnBrk="0" fontAlgn="base" latinLnBrk="0" hangingPunct="0">
+              <a:lnSpc>
+                <a:spcPct val="150000"/>
+              </a:lnSpc>
+              <a:spcBef>
+                <a:spcPct val="0"/>
+              </a:spcBef>
+              <a:spcAft>
+                <a:spcPct val="0"/>
+              </a:spcAft>
+              <a:buClrTx/>
+              <a:buSzTx/>
+              <a:buFontTx/>
+              <a:buChar char="•"/>
+              <a:tabLst/>
+            </a:pPr>
+            <a:r>
+              <a:rPr lang="en-US" altLang="en-US" sz="2400" dirty="0">
+                <a:latin typeface="Times New Roman" panose="02020603050405020304" pitchFamily="18" charset="0"/>
+                <a:cs typeface="Times New Roman" panose="02020603050405020304" pitchFamily="18" charset="0"/>
+              </a:rPr>
+              <a:t>SDG 7 – Affordable and Clean Energy: Optimizes energy efficiency by identifying consumption patterns and encouraging demand shifting to reduce peak electricity usage.</a:t>
+            </a:r>
+          </a:p>
+          <a:p>
+            <a:pPr marL="0" marR="0" lvl="0" indent="0" algn="l" defTabSz="914400" rtl="0" eaLnBrk="0" fontAlgn="base" latinLnBrk="0" hangingPunct="0">
+              <a:lnSpc>
+                <a:spcPct val="150000"/>
+              </a:lnSpc>
+              <a:spcBef>
+                <a:spcPct val="0"/>
+              </a:spcBef>
+              <a:spcAft>
+                <a:spcPct val="0"/>
+              </a:spcAft>
+              <a:buClrTx/>
+              <a:buSzTx/>
+              <a:buFontTx/>
+              <a:buChar char="•"/>
+              <a:tabLst/>
+            </a:pPr>
+            <a:r>
+              <a:rPr lang="en-US" altLang="en-US" sz="2400" dirty="0">
+                <a:latin typeface="Times New Roman" panose="02020603050405020304" pitchFamily="18" charset="0"/>
+                <a:cs typeface="Times New Roman" panose="02020603050405020304" pitchFamily="18" charset="0"/>
+              </a:rPr>
+              <a:t>SDG 11 – Sustainable Cities and Communities: Supports sustainable urban planning through community-level energy analysis and targeted grid management.</a:t>
+            </a:r>
+          </a:p>
+          <a:p>
+            <a:pPr marL="0" marR="0" lvl="0" indent="0" algn="l" defTabSz="914400" rtl="0" eaLnBrk="0" fontAlgn="base" latinLnBrk="0" hangingPunct="0">
+              <a:lnSpc>
+                <a:spcPct val="150000"/>
+              </a:lnSpc>
+              <a:spcBef>
+                <a:spcPct val="0"/>
+              </a:spcBef>
+              <a:spcAft>
+                <a:spcPct val="0"/>
+              </a:spcAft>
+              <a:buClrTx/>
+              <a:buSzTx/>
+              <a:buFontTx/>
+              <a:buChar char="•"/>
+              <a:tabLst/>
+            </a:pPr>
+            <a:r>
+              <a:rPr lang="en-US" altLang="en-US" sz="2400" dirty="0">
+                <a:latin typeface="Times New Roman" panose="02020603050405020304" pitchFamily="18" charset="0"/>
+                <a:cs typeface="Times New Roman" panose="02020603050405020304" pitchFamily="18" charset="0"/>
+              </a:rPr>
+              <a:t>SDG 12 – Responsible Consumption and Production: Promotes responsible energy consumption using behavioral pattern mining and personalized energy-saving recommendations.</a:t>
+            </a:r>
+          </a:p>
+          <a:p>
+            <a:pPr marL="0" marR="0" lvl="0" indent="0" algn="l" defTabSz="914400" rtl="0" eaLnBrk="0" fontAlgn="base" latinLnBrk="0" hangingPunct="0">
+              <a:lnSpc>
+                <a:spcPct val="150000"/>
+              </a:lnSpc>
+              <a:spcBef>
+                <a:spcPct val="0"/>
+              </a:spcBef>
+              <a:spcAft>
+                <a:spcPct val="0"/>
+              </a:spcAft>
+              <a:buClrTx/>
+              <a:buSzTx/>
+              <a:buFontTx/>
+              <a:buChar char="•"/>
+              <a:tabLst/>
+            </a:pPr>
+            <a:r>
+              <a:rPr lang="en-US" altLang="en-US" sz="2400" dirty="0">
+                <a:latin typeface="Times New Roman" panose="02020603050405020304" pitchFamily="18" charset="0"/>
+                <a:cs typeface="Times New Roman" panose="02020603050405020304" pitchFamily="18" charset="0"/>
+              </a:rPr>
+              <a:t>SDG 13 – Climate Action: Quantifies potential carbon emission reductions through data-driven energy interventions and policy impact simulations.</a:t>
+            </a:r>
+          </a:p>
+        </p:txBody>
+      </p:sp>
+    </p:spTree>
+    <p:extLst>
+      <p:ext uri="{BB962C8B-B14F-4D97-AF65-F5344CB8AC3E}">
+        <p14:creationId xmlns:p14="http://schemas.microsoft.com/office/powerpoint/2010/main" val="1319209515"/>
+      </p:ext>
+    </p:extLst>
+  </p:cSld>
+  <p:clrMapOvr>
+    <a:masterClrMapping/>
+  </p:clrMapOvr>
+</p:sld>
+</file>
+
+<file path=ppt/slides/slide4.xml><?xml version="1.0" encoding="utf-8"?>
+<p:sld xmlns:a="http://schemas.openxmlformats.org/drawingml/2006/main" xmlns:r="http://schemas.openxmlformats.org/officeDocument/2006/relationships" xmlns:p="http://schemas.openxmlformats.org/presentationml/2006/main">
+  <p:cSld>
+    <p:spTree>
+      <p:nvGrpSpPr>
+        <p:cNvPr id="1" name=""/>
+        <p:cNvGrpSpPr/>
+        <p:nvPr/>
+      </p:nvGrpSpPr>
+      <p:grpSpPr>
+        <a:xfrm>
+          <a:off x="0" y="0"/>
+          <a:ext cx="0" cy="0"/>
+          <a:chOff x="0" y="0"/>
+          <a:chExt cx="0" cy="0"/>
+        </a:xfrm>
+      </p:grpSpPr>
+      <p:pic>
+        <p:nvPicPr>
+          <p:cNvPr id="6" name="object 3">
+            <a:extLst>
+              <a:ext uri="{FF2B5EF4-FFF2-40B4-BE49-F238E27FC236}">
+                <a16:creationId xmlns:a16="http://schemas.microsoft.com/office/drawing/2014/main" id="{E2CF6C8C-3B52-C65C-D16C-825BDDE64493}"/>
+              </a:ext>
+            </a:extLst>
+          </p:cNvPr>
+          <p:cNvPicPr/>
+          <p:nvPr/>
+        </p:nvPicPr>
+        <p:blipFill>
+          <a:blip r:embed="rId2" cstate="print"/>
+          <a:stretch>
+            <a:fillRect/>
+          </a:stretch>
+        </p:blipFill>
+        <p:spPr>
+          <a:xfrm>
+            <a:off x="225851" y="143932"/>
+            <a:ext cx="822923" cy="914400"/>
+          </a:xfrm>
+          <a:prstGeom prst="rect">
+            <a:avLst/>
+          </a:prstGeom>
+        </p:spPr>
+      </p:pic>
+      <p:pic>
+        <p:nvPicPr>
+          <p:cNvPr id="7" name="object 4">
+            <a:extLst>
+              <a:ext uri="{FF2B5EF4-FFF2-40B4-BE49-F238E27FC236}">
+                <a16:creationId xmlns:a16="http://schemas.microsoft.com/office/drawing/2014/main" id="{1558F026-9386-0E28-9F04-077F9A905E5C}"/>
+              </a:ext>
+            </a:extLst>
+          </p:cNvPr>
+          <p:cNvPicPr/>
+          <p:nvPr/>
+        </p:nvPicPr>
+        <p:blipFill>
+          <a:blip r:embed="rId3" cstate="print"/>
+          <a:stretch>
+            <a:fillRect/>
+          </a:stretch>
+        </p:blipFill>
+        <p:spPr>
+          <a:xfrm>
+            <a:off x="10831033" y="308745"/>
+            <a:ext cx="1135116" cy="914400"/>
+          </a:xfrm>
+          <a:prstGeom prst="rect">
+            <a:avLst/>
+          </a:prstGeom>
+        </p:spPr>
+      </p:pic>
+      <p:sp>
+        <p:nvSpPr>
+          <p:cNvPr id="2" name="TextBox 1">
+            <a:extLst>
+              <a:ext uri="{FF2B5EF4-FFF2-40B4-BE49-F238E27FC236}">
+                <a16:creationId xmlns:a16="http://schemas.microsoft.com/office/drawing/2014/main" id="{365CF1C4-F100-1349-F04F-136BAE326DAE}"/>
+              </a:ext>
+            </a:extLst>
+          </p:cNvPr>
+          <p:cNvSpPr txBox="1"/>
+          <p:nvPr/>
+        </p:nvSpPr>
+        <p:spPr>
+          <a:xfrm>
+            <a:off x="4431317" y="765945"/>
+            <a:ext cx="2805255" cy="646331"/>
+          </a:xfrm>
+          <a:prstGeom prst="rect">
+            <a:avLst/>
+          </a:prstGeom>
+          <a:noFill/>
+        </p:spPr>
+        <p:txBody>
+          <a:bodyPr wrap="none" rtlCol="0">
+            <a:spAutoFit/>
+          </a:bodyPr>
+          <a:lstStyle/>
+          <a:p>
+            <a:r>
+              <a:rPr lang="en-IN" sz="3600" b="1" dirty="0">
+                <a:solidFill>
+                  <a:srgbClr val="C00000"/>
+                </a:solidFill>
+                <a:latin typeface="Times New Roman" panose="02020603050405020304" pitchFamily="18" charset="0"/>
+                <a:cs typeface="Times New Roman" panose="02020603050405020304" pitchFamily="18" charset="0"/>
+              </a:rPr>
+              <a:t>Introduction</a:t>
+            </a:r>
+            <a:r>
+              <a:rPr lang="en-IN" sz="3600" b="1" dirty="0">
+                <a:latin typeface="Times New Roman" panose="02020603050405020304" pitchFamily="18" charset="0"/>
+                <a:cs typeface="Times New Roman" panose="02020603050405020304" pitchFamily="18" charset="0"/>
+              </a:rPr>
+              <a:t> </a:t>
+            </a:r>
+          </a:p>
+        </p:txBody>
+      </p:sp>
+      <p:sp>
+        <p:nvSpPr>
+          <p:cNvPr id="3" name="TextBox 2">
+            <a:extLst>
+              <a:ext uri="{FF2B5EF4-FFF2-40B4-BE49-F238E27FC236}">
+                <a16:creationId xmlns:a16="http://schemas.microsoft.com/office/drawing/2014/main" id="{D8EFFF3E-D1C8-D397-2C55-5013AFFA8AA1}"/>
+              </a:ext>
+            </a:extLst>
+          </p:cNvPr>
+          <p:cNvSpPr txBox="1"/>
+          <p:nvPr/>
+        </p:nvSpPr>
+        <p:spPr>
+          <a:xfrm>
+            <a:off x="637312" y="1700142"/>
+            <a:ext cx="9899374" cy="4191981"/>
+          </a:xfrm>
+          <a:prstGeom prst="rect">
+            <a:avLst/>
+          </a:prstGeom>
+          <a:noFill/>
+        </p:spPr>
+        <p:txBody>
+          <a:bodyPr wrap="square" rtlCol="0">
+            <a:spAutoFit/>
+          </a:bodyPr>
+          <a:lstStyle/>
+          <a:p>
+            <a:pPr marL="342900" indent="-342900">
+              <a:lnSpc>
+                <a:spcPct val="150000"/>
+              </a:lnSpc>
+              <a:buFont typeface="Arial" panose="020B0604020202020204" pitchFamily="34" charset="0"/>
+              <a:buChar char="•"/>
+            </a:pPr>
+            <a:r>
+              <a:rPr lang="en-US" sz="2000" dirty="0">
+                <a:latin typeface="Times New Roman" panose="02020603050405020304" pitchFamily="18" charset="0"/>
+                <a:cs typeface="Times New Roman" panose="02020603050405020304" pitchFamily="18" charset="0"/>
+              </a:rPr>
+              <a:t>Household electricity consumption plays a significant role in energy sustainability and carbon emissions.</a:t>
+            </a:r>
+          </a:p>
+          <a:p>
+            <a:pPr marL="342900" indent="-342900">
+              <a:lnSpc>
+                <a:spcPct val="150000"/>
+              </a:lnSpc>
+              <a:buFont typeface="Arial" panose="020B0604020202020204" pitchFamily="34" charset="0"/>
+              <a:buChar char="•"/>
+            </a:pPr>
+            <a:r>
+              <a:rPr lang="en-US" sz="2000" dirty="0">
+                <a:latin typeface="Times New Roman" panose="02020603050405020304" pitchFamily="18" charset="0"/>
+                <a:cs typeface="Times New Roman" panose="02020603050405020304" pitchFamily="18" charset="0"/>
+              </a:rPr>
+              <a:t>Smart meters generate large amounts of data that can reveal valuable consumption patterns.</a:t>
+            </a:r>
+          </a:p>
+          <a:p>
+            <a:pPr marL="342900" indent="-342900">
+              <a:lnSpc>
+                <a:spcPct val="150000"/>
+              </a:lnSpc>
+              <a:buFont typeface="Arial" panose="020B0604020202020204" pitchFamily="34" charset="0"/>
+              <a:buChar char="•"/>
+            </a:pPr>
+            <a:r>
+              <a:rPr lang="en-US" sz="2000" dirty="0">
+                <a:latin typeface="Times New Roman" panose="02020603050405020304" pitchFamily="18" charset="0"/>
+                <a:cs typeface="Times New Roman" panose="02020603050405020304" pitchFamily="18" charset="0"/>
+              </a:rPr>
+              <a:t>Traditional monitoring methods provide limited insights into unusual usage and energy-saving opportunities.</a:t>
+            </a:r>
+          </a:p>
+          <a:p>
+            <a:pPr marL="342900" indent="-342900">
+              <a:lnSpc>
+                <a:spcPct val="150000"/>
+              </a:lnSpc>
+              <a:buFont typeface="Arial" panose="020B0604020202020204" pitchFamily="34" charset="0"/>
+              <a:buChar char="•"/>
+            </a:pPr>
+            <a:r>
+              <a:rPr lang="en-US" sz="2000" dirty="0">
+                <a:latin typeface="Times New Roman" panose="02020603050405020304" pitchFamily="18" charset="0"/>
+                <a:cs typeface="Times New Roman" panose="02020603050405020304" pitchFamily="18" charset="0"/>
+              </a:rPr>
+              <a:t>Sustainability Intelligence uses data warehousing and data mining techniques to analyze electricity consumption.</a:t>
+            </a:r>
+          </a:p>
+          <a:p>
+            <a:pPr marL="342900" indent="-342900">
+              <a:lnSpc>
+                <a:spcPct val="150000"/>
+              </a:lnSpc>
+              <a:buFont typeface="Arial" panose="020B0604020202020204" pitchFamily="34" charset="0"/>
+              <a:buChar char="•"/>
+            </a:pPr>
+            <a:r>
+              <a:rPr lang="en-US" sz="2000" dirty="0">
+                <a:latin typeface="Times New Roman" panose="02020603050405020304" pitchFamily="18" charset="0"/>
+                <a:cs typeface="Times New Roman" panose="02020603050405020304" pitchFamily="18" charset="0"/>
+              </a:rPr>
+              <a:t>An interactive dashboard provides actionable recommendations to improve energy efficiency and promote sustainable living.</a:t>
+            </a:r>
+          </a:p>
+        </p:txBody>
+      </p:sp>
+    </p:spTree>
+    <p:extLst>
+      <p:ext uri="{BB962C8B-B14F-4D97-AF65-F5344CB8AC3E}">
+        <p14:creationId xmlns:p14="http://schemas.microsoft.com/office/powerpoint/2010/main" val="1116747520"/>
+      </p:ext>
+    </p:extLst>
+  </p:cSld>
+  <p:clrMapOvr>
+    <a:masterClrMapping/>
+  </p:clrMapOvr>
+</p:sld>
+</file>
+
+<file path=ppt/slides/slide5.xml><?xml version="1.0" encoding="utf-8"?>
+<p:sld xmlns:a="http://schemas.openxmlformats.org/drawingml/2006/main" xmlns:r="http://schemas.openxmlformats.org/officeDocument/2006/relationships" xmlns:p="http://schemas.openxmlformats.org/presentationml/2006/main">
+  <p:cSld>
+    <p:spTree>
+      <p:nvGrpSpPr>
+        <p:cNvPr id="1" name="">
+          <a:extLst>
+            <a:ext uri="{FF2B5EF4-FFF2-40B4-BE49-F238E27FC236}">
+              <a16:creationId xmlns:a16="http://schemas.microsoft.com/office/drawing/2014/main" id="{F2884AC9-0B8F-306D-5208-D61ECFD18C56}"/>
+            </a:ext>
+          </a:extLst>
+        </p:cNvPr>
+        <p:cNvGrpSpPr/>
+        <p:nvPr/>
+      </p:nvGrpSpPr>
+      <p:grpSpPr>
+        <a:xfrm>
+          <a:off x="0" y="0"/>
+          <a:ext cx="0" cy="0"/>
+          <a:chOff x="0" y="0"/>
+          <a:chExt cx="0" cy="0"/>
+        </a:xfrm>
+      </p:grpSpPr>
+      <p:pic>
+        <p:nvPicPr>
+          <p:cNvPr id="6" name="object 3">
+            <a:extLst>
+              <a:ext uri="{FF2B5EF4-FFF2-40B4-BE49-F238E27FC236}">
+                <a16:creationId xmlns:a16="http://schemas.microsoft.com/office/drawing/2014/main" id="{8EAB119B-919C-6F85-00E1-BE56AA7410E3}"/>
+              </a:ext>
+            </a:extLst>
+          </p:cNvPr>
+          <p:cNvPicPr/>
+          <p:nvPr/>
+        </p:nvPicPr>
+        <p:blipFill>
+          <a:blip r:embed="rId2" cstate="print"/>
+          <a:stretch>
+            <a:fillRect/>
+          </a:stretch>
+        </p:blipFill>
+        <p:spPr>
+          <a:xfrm>
+            <a:off x="225851" y="143932"/>
+            <a:ext cx="822923" cy="914400"/>
+          </a:xfrm>
+          <a:prstGeom prst="rect">
+            <a:avLst/>
+          </a:prstGeom>
+        </p:spPr>
+      </p:pic>
+      <p:pic>
+        <p:nvPicPr>
+          <p:cNvPr id="7" name="object 4">
+            <a:extLst>
+              <a:ext uri="{FF2B5EF4-FFF2-40B4-BE49-F238E27FC236}">
+                <a16:creationId xmlns:a16="http://schemas.microsoft.com/office/drawing/2014/main" id="{2E876DE2-0AE6-24C8-CA85-2167CACF23D0}"/>
+              </a:ext>
+            </a:extLst>
+          </p:cNvPr>
+          <p:cNvPicPr/>
+          <p:nvPr/>
+        </p:nvPicPr>
+        <p:blipFill>
+          <a:blip r:embed="rId3" cstate="print"/>
+          <a:stretch>
+            <a:fillRect/>
+          </a:stretch>
+        </p:blipFill>
+        <p:spPr>
+          <a:xfrm>
+            <a:off x="10831033" y="288867"/>
+            <a:ext cx="1135116" cy="914400"/>
+          </a:xfrm>
+          <a:prstGeom prst="rect">
+            <a:avLst/>
+          </a:prstGeom>
+        </p:spPr>
+      </p:pic>
+      <p:sp>
+        <p:nvSpPr>
+          <p:cNvPr id="2" name="TextBox 1">
+            <a:extLst>
+              <a:ext uri="{FF2B5EF4-FFF2-40B4-BE49-F238E27FC236}">
+                <a16:creationId xmlns:a16="http://schemas.microsoft.com/office/drawing/2014/main" id="{BA52A1C2-F91B-E505-F823-EB2E8268B116}"/>
+              </a:ext>
+            </a:extLst>
+          </p:cNvPr>
+          <p:cNvSpPr txBox="1"/>
+          <p:nvPr/>
+        </p:nvSpPr>
+        <p:spPr>
+          <a:xfrm>
+            <a:off x="4218925" y="766493"/>
+            <a:ext cx="2159566" cy="646331"/>
+          </a:xfrm>
+          <a:prstGeom prst="rect">
+            <a:avLst/>
+          </a:prstGeom>
+          <a:noFill/>
+        </p:spPr>
+        <p:txBody>
+          <a:bodyPr wrap="none" rtlCol="0">
+            <a:spAutoFit/>
+          </a:bodyPr>
+          <a:lstStyle/>
+          <a:p>
+            <a:r>
+              <a:rPr lang="en-IN" sz="3600" dirty="0">
+                <a:solidFill>
+                  <a:srgbClr val="C00000"/>
+                </a:solidFill>
+                <a:latin typeface="Times New Roman" panose="02020603050405020304" pitchFamily="18" charset="0"/>
+                <a:cs typeface="Times New Roman" panose="02020603050405020304" pitchFamily="18" charset="0"/>
+              </a:rPr>
+              <a:t>Objectives</a:t>
+            </a:r>
+            <a:endParaRPr lang="en-IN" sz="3600" b="1" dirty="0">
+              <a:solidFill>
+                <a:srgbClr val="C00000"/>
+              </a:solidFill>
+              <a:latin typeface="Times New Roman" panose="02020603050405020304" pitchFamily="18" charset="0"/>
+              <a:cs typeface="Times New Roman" panose="02020603050405020304" pitchFamily="18" charset="0"/>
+            </a:endParaRPr>
+          </a:p>
+        </p:txBody>
+      </p:sp>
+      <p:sp>
+        <p:nvSpPr>
+          <p:cNvPr id="3" name="Rectangle 1">
+            <a:extLst>
+              <a:ext uri="{FF2B5EF4-FFF2-40B4-BE49-F238E27FC236}">
+                <a16:creationId xmlns:a16="http://schemas.microsoft.com/office/drawing/2014/main" id="{B86B1F29-7C20-D6F8-B788-840554364448}"/>
+              </a:ext>
+            </a:extLst>
+          </p:cNvPr>
+          <p:cNvSpPr>
+            <a:spLocks noChangeArrowheads="1"/>
+          </p:cNvSpPr>
+          <p:nvPr/>
+        </p:nvSpPr>
+        <p:spPr bwMode="auto">
+          <a:xfrm>
+            <a:off x="408713" y="1342551"/>
+            <a:ext cx="7080223" cy="4653646"/>
+          </a:xfrm>
+          <a:prstGeom prst="rect">
+            <a:avLst/>
+          </a:prstGeom>
+          <a:noFill/>
+          <a:ln>
+            <a:noFill/>
+          </a:ln>
+          <a:effectLst/>
+          <a:extLst>
+            <a:ext uri="{909E8E84-426E-40DD-AFC4-6F175D3DCCD1}">
+              <a14:hiddenFill xmlns:a14="http://schemas.microsoft.com/office/drawing/2010/main">
+                <a:solidFill>
+                  <a:schemeClr val="accent1"/>
+                </a:solidFill>
+              </a14:hiddenFill>
+            </a:ext>
+            <a:ext uri="{91240B29-F687-4F45-9708-019B960494DF}">
+              <a14:hiddenLine xmlns:a14="http://schemas.microsoft.com/office/drawing/2010/main" w="9525">
+                <a:solidFill>
+                  <a:schemeClr val="tx1"/>
+                </a:solidFill>
+                <a:miter lim="800000"/>
+                <a:headEnd/>
+                <a:tailEnd/>
+              </a14:hiddenLine>
+            </a:ext>
+            <a:ext uri="{AF507438-7753-43E0-B8FC-AC1667EBCBE1}">
+              <a14:hiddenEffects xmlns:a14="http://schemas.microsoft.com/office/drawing/2010/main">
+                <a:effectLst>
+                  <a:outerShdw dist="35921" dir="2700000" algn="ctr" rotWithShape="0">
+                    <a:schemeClr val="bg2"/>
+                  </a:outerShdw>
+                </a:effectLst>
+              </a14:hiddenEffects>
+            </a:ext>
+          </a:extLst>
+        </p:spPr>
+        <p:txBody>
+          <a:bodyPr vert="horz" wrap="square" lIns="91440" tIns="45720" rIns="91440" bIns="45720" numCol="1" anchor="ctr" anchorCtr="0" compatLnSpc="1">
+            <a:prstTxWarp prst="textNoShape">
+              <a:avLst/>
+            </a:prstTxWarp>
+            <a:spAutoFit/>
+          </a:bodyPr>
+          <a:lstStyle/>
+          <a:p>
             <a:pPr marL="342900" indent="-342900">
               <a:lnSpc>
                 <a:spcPct val="150000"/>
@@ -6754,8 +6618,8 @@
         </p:blipFill>
         <p:spPr>
           <a:xfrm>
-            <a:off x="7942807" y="2048256"/>
-            <a:ext cx="3840480" cy="2560320"/>
+            <a:off x="7488936" y="2048256"/>
+            <a:ext cx="4294351" cy="3346704"/>
           </a:xfrm>
           <a:prstGeom prst="rect">
             <a:avLst/>
@@ -6775,7 +6639,7 @@
 </p:sld>
 </file>
 
-<file path=ppt/slides/slide5.xml><?xml version="1.0" encoding="utf-8"?>
+<file path=ppt/slides/slide6.xml><?xml version="1.0" encoding="utf-8"?>
 <p:sld xmlns:a="http://schemas.openxmlformats.org/drawingml/2006/main" xmlns:r="http://schemas.openxmlformats.org/officeDocument/2006/relationships" xmlns:p="http://schemas.openxmlformats.org/presentationml/2006/main">
   <p:cSld>
     <p:spTree>
@@ -6845,14 +6709,14 @@
             <p:ph idx="1"/>
             <p:extLst>
               <p:ext uri="{D42A27DB-BD31-4B8C-83A1-F6EECF244321}">
-                <p14:modId xmlns:p14="http://schemas.microsoft.com/office/powerpoint/2010/main" val="739425000"/>
+                <p14:modId xmlns:p14="http://schemas.microsoft.com/office/powerpoint/2010/main" val="3622275144"/>
               </p:ext>
             </p:extLst>
           </p:nvPr>
         </p:nvGraphicFramePr>
         <p:xfrm>
-          <a:off x="1295399" y="1570304"/>
-          <a:ext cx="9431868" cy="4351338"/>
+          <a:off x="641604" y="1359992"/>
+          <a:ext cx="10908792" cy="5358462"/>
         </p:xfrm>
         <a:graphic>
           <a:graphicData uri="http://schemas.openxmlformats.org/drawingml/2006/table">
@@ -6861,42 +6725,42 @@
                 <a:tableStyleId>{3C2FFA5D-87B4-456A-9821-1D502468CF0F}</a:tableStyleId>
               </a:tblPr>
               <a:tblGrid>
-                <a:gridCol w="1571978">
+                <a:gridCol w="457200">
                   <a:extLst>
                     <a:ext uri="{9D8B030D-6E8A-4147-A177-3AD203B41FA5}">
                       <a16:colId xmlns:a16="http://schemas.microsoft.com/office/drawing/2014/main" val="1744373548"/>
                     </a:ext>
                   </a:extLst>
                 </a:gridCol>
-                <a:gridCol w="1571978">
+                <a:gridCol w="1207008">
                   <a:extLst>
                     <a:ext uri="{9D8B030D-6E8A-4147-A177-3AD203B41FA5}">
                       <a16:colId xmlns:a16="http://schemas.microsoft.com/office/drawing/2014/main" val="3443793557"/>
                     </a:ext>
                   </a:extLst>
                 </a:gridCol>
-                <a:gridCol w="1571978">
+                <a:gridCol w="1479804">
                   <a:extLst>
                     <a:ext uri="{9D8B030D-6E8A-4147-A177-3AD203B41FA5}">
                       <a16:colId xmlns:a16="http://schemas.microsoft.com/office/drawing/2014/main" val="1396043077"/>
                     </a:ext>
                   </a:extLst>
                 </a:gridCol>
-                <a:gridCol w="1571978">
+                <a:gridCol w="2113788">
                   <a:extLst>
                     <a:ext uri="{9D8B030D-6E8A-4147-A177-3AD203B41FA5}">
                       <a16:colId xmlns:a16="http://schemas.microsoft.com/office/drawing/2014/main" val="223754063"/>
                     </a:ext>
                   </a:extLst>
                 </a:gridCol>
-                <a:gridCol w="1571978">
+                <a:gridCol w="3070860">
                   <a:extLst>
                     <a:ext uri="{9D8B030D-6E8A-4147-A177-3AD203B41FA5}">
                       <a16:colId xmlns:a16="http://schemas.microsoft.com/office/drawing/2014/main" val="4023572820"/>
                     </a:ext>
                   </a:extLst>
                 </a:gridCol>
-                <a:gridCol w="1571978">
+                <a:gridCol w="2580132">
                   <a:extLst>
                     <a:ext uri="{9D8B030D-6E8A-4147-A177-3AD203B41FA5}">
                       <a16:colId xmlns:a16="http://schemas.microsoft.com/office/drawing/2014/main" val="3098245183"/>
@@ -6910,13 +6774,18 @@
                     <a:bodyPr/>
                     <a:lstStyle/>
                     <a:p>
+                      <a:pPr lvl="0" algn="just"/>
                       <a:r>
-                        <a:rPr lang="en-IN" sz="1200">
+                        <a:rPr lang="en-IN" sz="1500">
                           <a:latin typeface="Times New Roman" panose="02020603050405020304" pitchFamily="18" charset="0"/>
                           <a:cs typeface="Times New Roman" panose="02020603050405020304" pitchFamily="18" charset="0"/>
                         </a:rPr>
                         <a:t>S.No</a:t>
                       </a:r>
+                      <a:endParaRPr lang="en-IN" sz="1500" dirty="0">
+                        <a:latin typeface="Times New Roman" panose="02020603050405020304" pitchFamily="18" charset="0"/>
+                        <a:cs typeface="Times New Roman" panose="02020603050405020304" pitchFamily="18" charset="0"/>
+                      </a:endParaRPr>
                     </a:p>
                   </a:txBody>
                   <a:tcPr marL="38170" marR="38170" marT="19085" marB="19085" anchor="ctr"/>
@@ -6926,8 +6795,9 @@
                     <a:bodyPr/>
                     <a:lstStyle/>
                     <a:p>
+                      <a:pPr lvl="0" algn="just"/>
                       <a:r>
-                        <a:rPr lang="en-IN" sz="1200">
+                        <a:rPr lang="en-IN" sz="1500">
                           <a:latin typeface="Times New Roman" panose="02020603050405020304" pitchFamily="18" charset="0"/>
                           <a:cs typeface="Times New Roman" panose="02020603050405020304" pitchFamily="18" charset="0"/>
                         </a:rPr>
@@ -6942,8 +6812,9 @@
                     <a:bodyPr/>
                     <a:lstStyle/>
                     <a:p>
+                      <a:pPr lvl="0" algn="just"/>
                       <a:r>
-                        <a:rPr lang="en-IN" sz="1200">
+                        <a:rPr lang="en-IN" sz="1500">
                           <a:latin typeface="Times New Roman" panose="02020603050405020304" pitchFamily="18" charset="0"/>
                           <a:cs typeface="Times New Roman" panose="02020603050405020304" pitchFamily="18" charset="0"/>
                         </a:rPr>
@@ -6958,8 +6829,9 @@
                     <a:bodyPr/>
                     <a:lstStyle/>
                     <a:p>
+                      <a:pPr lvl="0" algn="just"/>
                       <a:r>
-                        <a:rPr lang="en-IN" sz="1200">
+                        <a:rPr lang="en-IN" sz="1500">
                           <a:latin typeface="Times New Roman" panose="02020603050405020304" pitchFamily="18" charset="0"/>
                           <a:cs typeface="Times New Roman" panose="02020603050405020304" pitchFamily="18" charset="0"/>
                         </a:rPr>
@@ -6974,8 +6846,9 @@
                     <a:bodyPr/>
                     <a:lstStyle/>
                     <a:p>
+                      <a:pPr lvl="0" algn="just"/>
                       <a:r>
-                        <a:rPr lang="en-IN" sz="1200">
+                        <a:rPr lang="en-IN" sz="1500">
                           <a:latin typeface="Times New Roman" panose="02020603050405020304" pitchFamily="18" charset="0"/>
                           <a:cs typeface="Times New Roman" panose="02020603050405020304" pitchFamily="18" charset="0"/>
                         </a:rPr>
@@ -6990,8 +6863,9 @@
                     <a:bodyPr/>
                     <a:lstStyle/>
                     <a:p>
+                      <a:pPr lvl="0" algn="just"/>
                       <a:r>
-                        <a:rPr lang="en-IN" sz="1200">
+                        <a:rPr lang="en-IN" sz="1500" dirty="0">
                           <a:latin typeface="Times New Roman" panose="02020603050405020304" pitchFamily="18" charset="0"/>
                           <a:cs typeface="Times New Roman" panose="02020603050405020304" pitchFamily="18" charset="0"/>
                         </a:rPr>
@@ -7013,8 +6887,11 @@
                     <a:bodyPr/>
                     <a:lstStyle/>
                     <a:p>
+                      <a:pPr lvl="0" algn="just">
+                        <a:buNone/>
+                      </a:pPr>
                       <a:r>
-                        <a:rPr lang="en-IN" sz="1200">
+                        <a:rPr lang="en-IN" sz="1500" dirty="0">
                           <a:latin typeface="Times New Roman" panose="02020603050405020304" pitchFamily="18" charset="0"/>
                           <a:cs typeface="Times New Roman" panose="02020603050405020304" pitchFamily="18" charset="0"/>
                         </a:rPr>
@@ -7022,87 +6899,109 @@
                       </a:r>
                     </a:p>
                   </a:txBody>
-                  <a:tcPr marL="38170" marR="38170" marT="19085" marB="19085" anchor="ctr"/>
+                  <a:tcPr anchor="ctr"/>
                 </a:tc>
                 <a:tc>
                   <a:txBody>
                     <a:bodyPr/>
                     <a:lstStyle/>
                     <a:p>
+                      <a:pPr lvl="0" algn="just">
+                        <a:buNone/>
+                      </a:pPr>
                       <a:r>
-                        <a:rPr lang="en-IN" sz="1200">
+                        <a:rPr lang="en-IN" sz="1500">
                           <a:latin typeface="Times New Roman" panose="02020603050405020304" pitchFamily="18" charset="0"/>
                           <a:cs typeface="Times New Roman" panose="02020603050405020304" pitchFamily="18" charset="0"/>
                         </a:rPr>
-                        <a:t>Event Recommendation</a:t>
+                        <a:t>Electricity Load Profiling</a:t>
                       </a:r>
                     </a:p>
                   </a:txBody>
-                  <a:tcPr marL="38170" marR="38170" marT="19085" marB="19085" anchor="ctr"/>
+                  <a:tcPr anchor="ctr"/>
                 </a:tc>
                 <a:tc>
                   <a:txBody>
                     <a:bodyPr/>
                     <a:lstStyle/>
                     <a:p>
+                      <a:pPr lvl="0" algn="just">
+                        <a:buNone/>
+                      </a:pPr>
                       <a:r>
-                        <a:rPr lang="en-IN" sz="1200">
+                        <a:rPr lang="en-IN" sz="1500" dirty="0" err="1">
                           <a:latin typeface="Times New Roman" panose="02020603050405020304" pitchFamily="18" charset="0"/>
                           <a:cs typeface="Times New Roman" panose="02020603050405020304" pitchFamily="18" charset="0"/>
                         </a:rPr>
-                        <a:t>Qiao et al., 2014</a:t>
+                        <a:t>Michalakopoulos</a:t>
+                      </a:r>
+                      <a:r>
+                        <a:rPr lang="en-IN" sz="1500" dirty="0">
+                          <a:latin typeface="Times New Roman" panose="02020603050405020304" pitchFamily="18" charset="0"/>
+                          <a:cs typeface="Times New Roman" panose="02020603050405020304" pitchFamily="18" charset="0"/>
+                        </a:rPr>
+                        <a:t> et al., 2024</a:t>
                       </a:r>
                     </a:p>
                   </a:txBody>
-                  <a:tcPr marL="38170" marR="38170" marT="19085" marB="19085" anchor="ctr"/>
+                  <a:tcPr anchor="ctr"/>
                 </a:tc>
                 <a:tc>
                   <a:txBody>
                     <a:bodyPr/>
                     <a:lstStyle/>
                     <a:p>
+                      <a:pPr lvl="0" algn="just">
+                        <a:buNone/>
+                      </a:pPr>
                       <a:r>
-                        <a:rPr lang="en-IN" sz="1200">
+                        <a:rPr lang="en-IN" sz="1500" dirty="0">
                           <a:latin typeface="Times New Roman" panose="02020603050405020304" pitchFamily="18" charset="0"/>
                           <a:cs typeface="Times New Roman" panose="02020603050405020304" pitchFamily="18" charset="0"/>
                         </a:rPr>
-                        <a:t>Social Network Analysis</a:t>
+                        <a:t>K-Means Clustering, Machine Learning</a:t>
                       </a:r>
                     </a:p>
                   </a:txBody>
-                  <a:tcPr marL="38170" marR="38170" marT="19085" marB="19085" anchor="ctr"/>
+                  <a:tcPr anchor="ctr"/>
                 </a:tc>
                 <a:tc>
                   <a:txBody>
                     <a:bodyPr/>
                     <a:lstStyle/>
                     <a:p>
+                      <a:pPr lvl="0" algn="just">
+                        <a:buNone/>
+                      </a:pPr>
                       <a:r>
-                        <a:rPr lang="en-US" sz="1200">
+                        <a:rPr lang="en-IN" sz="1500">
                           <a:latin typeface="Times New Roman" panose="02020603050405020304" pitchFamily="18" charset="0"/>
                           <a:cs typeface="Times New Roman" panose="02020603050405020304" pitchFamily="18" charset="0"/>
                         </a:rPr>
-                        <a:t>Social relationships and user preferences help recommend relevant events.</a:t>
+                        <a:t>Clustering household load profiles helps identify consumption patterns and demand-response opportunities.</a:t>
                       </a:r>
                     </a:p>
                   </a:txBody>
-                  <a:tcPr marL="38170" marR="38170" marT="19085" marB="19085" anchor="ctr"/>
+                  <a:tcPr anchor="ctr"/>
                 </a:tc>
                 <a:tc>
                   <a:txBody>
                     <a:bodyPr/>
                     <a:lstStyle/>
                     <a:p>
+                      <a:pPr lvl="0" algn="just">
+                        <a:buNone/>
+                      </a:pPr>
                       <a:r>
-                        <a:rPr lang="en-US" sz="1200">
+                        <a:rPr lang="en-IN" sz="1500">
                           <a:latin typeface="Times New Roman" panose="02020603050405020304" pitchFamily="18" charset="0"/>
                           <a:cs typeface="Times New Roman" panose="02020603050405020304" pitchFamily="18" charset="0"/>
                         </a:rPr>
-                        <a:t>Suggests activities based on user interests.</a:t>
+                        <a:t>Identifies household energy personas and peak-demand patterns.</a:t>
                       </a:r>
                     </a:p>
                   </a:txBody>
-                  <a:tcPr marL="38170" marR="38170" marT="19085" marB="19085" anchor="ctr"/>
+                  <a:tcPr anchor="ctr"/>
                 </a:tc>
                 <a:extLst>
                   <a:ext uri="{0D108BD9-81ED-4DB2-BD59-A6C34878D82A}">
@@ -7116,8 +7015,11 @@
                     <a:bodyPr/>
                     <a:lstStyle/>
                     <a:p>
+                      <a:pPr lvl="0" algn="just">
+                        <a:buNone/>
+                      </a:pPr>
                       <a:r>
-                        <a:rPr lang="en-IN" sz="1200">
+                        <a:rPr lang="en-IN" sz="1500">
                           <a:latin typeface="Times New Roman" panose="02020603050405020304" pitchFamily="18" charset="0"/>
                           <a:cs typeface="Times New Roman" panose="02020603050405020304" pitchFamily="18" charset="0"/>
                         </a:rPr>
@@ -7125,87 +7027,102 @@
                       </a:r>
                     </a:p>
                   </a:txBody>
-                  <a:tcPr marL="38170" marR="38170" marT="19085" marB="19085" anchor="ctr"/>
+                  <a:tcPr anchor="ctr"/>
                 </a:tc>
                 <a:tc>
                   <a:txBody>
                     <a:bodyPr/>
                     <a:lstStyle/>
                     <a:p>
+                      <a:pPr lvl="0" algn="just">
+                        <a:buNone/>
+                      </a:pPr>
                       <a:r>
-                        <a:rPr lang="en-IN" sz="1200">
+                        <a:rPr lang="en-IN" sz="1500">
                           <a:latin typeface="Times New Roman" panose="02020603050405020304" pitchFamily="18" charset="0"/>
                           <a:cs typeface="Times New Roman" panose="02020603050405020304" pitchFamily="18" charset="0"/>
                         </a:rPr>
-                        <a:t>Online Communities</a:t>
+                        <a:t>Smart-Grid Behavioral Analysis</a:t>
                       </a:r>
                     </a:p>
                   </a:txBody>
-                  <a:tcPr marL="38170" marR="38170" marT="19085" marB="19085" anchor="ctr"/>
+                  <a:tcPr anchor="ctr"/>
                 </a:tc>
                 <a:tc>
                   <a:txBody>
                     <a:bodyPr/>
                     <a:lstStyle/>
                     <a:p>
+                      <a:pPr lvl="0" algn="just">
+                        <a:buNone/>
+                      </a:pPr>
                       <a:r>
-                        <a:rPr lang="en-IN" sz="1200">
+                        <a:rPr lang="en-IN" sz="1500">
                           <a:latin typeface="Times New Roman" panose="02020603050405020304" pitchFamily="18" charset="0"/>
                           <a:cs typeface="Times New Roman" panose="02020603050405020304" pitchFamily="18" charset="0"/>
                         </a:rPr>
-                        <a:t>Malinen, 2015</a:t>
+                        <a:t>IEEE Research, 2019</a:t>
                       </a:r>
                     </a:p>
                   </a:txBody>
-                  <a:tcPr marL="38170" marR="38170" marT="19085" marB="19085" anchor="ctr"/>
+                  <a:tcPr anchor="ctr"/>
                 </a:tc>
                 <a:tc>
                   <a:txBody>
                     <a:bodyPr/>
                     <a:lstStyle/>
                     <a:p>
+                      <a:pPr lvl="0" algn="just">
+                        <a:buNone/>
+                      </a:pPr>
                       <a:r>
-                        <a:rPr lang="en-IN" sz="1200">
+                        <a:rPr lang="en-IN" sz="1500">
                           <a:latin typeface="Times New Roman" panose="02020603050405020304" pitchFamily="18" charset="0"/>
                           <a:cs typeface="Times New Roman" panose="02020603050405020304" pitchFamily="18" charset="0"/>
                         </a:rPr>
-                        <a:t>Community Engagement Analysis</a:t>
+                        <a:t>Energy Consumption Pattern Mining</a:t>
                       </a:r>
                     </a:p>
                   </a:txBody>
-                  <a:tcPr marL="38170" marR="38170" marT="19085" marB="19085" anchor="ctr"/>
+                  <a:tcPr anchor="ctr"/>
                 </a:tc>
                 <a:tc>
                   <a:txBody>
                     <a:bodyPr/>
                     <a:lstStyle/>
                     <a:p>
+                      <a:pPr lvl="0" algn="just">
+                        <a:buNone/>
+                      </a:pPr>
                       <a:r>
-                        <a:rPr lang="en-IN" sz="1200">
+                        <a:rPr lang="en-IN" sz="1500">
                           <a:latin typeface="Times New Roman" panose="02020603050405020304" pitchFamily="18" charset="0"/>
                           <a:cs typeface="Times New Roman" panose="02020603050405020304" pitchFamily="18" charset="0"/>
                         </a:rPr>
-                        <a:t>User participation supports active online communities.</a:t>
+                        <a:t>Mining smart-meter data reveals recurring household electricity consumption behaviors.</a:t>
                       </a:r>
                     </a:p>
                   </a:txBody>
-                  <a:tcPr marL="38170" marR="38170" marT="19085" marB="19085" anchor="ctr"/>
+                  <a:tcPr anchor="ctr"/>
                 </a:tc>
                 <a:tc>
                   <a:txBody>
                     <a:bodyPr/>
                     <a:lstStyle/>
                     <a:p>
+                      <a:pPr lvl="0" algn="just">
+                        <a:buNone/>
+                      </a:pPr>
                       <a:r>
-                        <a:rPr lang="en-US" sz="1200">
+                        <a:rPr lang="en-IN" sz="1500">
                           <a:latin typeface="Times New Roman" panose="02020603050405020304" pitchFamily="18" charset="0"/>
                           <a:cs typeface="Times New Roman" panose="02020603050405020304" pitchFamily="18" charset="0"/>
                         </a:rPr>
-                        <a:t>Encourages users to join and interact in activities.</a:t>
+                        <a:t>Supports behavioral analysis and targeted energy-saving recommendations.</a:t>
                       </a:r>
                     </a:p>
                   </a:txBody>
-                  <a:tcPr marL="38170" marR="38170" marT="19085" marB="19085" anchor="ctr"/>
+                  <a:tcPr anchor="ctr"/>
                 </a:tc>
                 <a:extLst>
                   <a:ext uri="{0D108BD9-81ED-4DB2-BD59-A6C34878D82A}">
@@ -7219,8 +7136,11 @@
                     <a:bodyPr/>
                     <a:lstStyle/>
                     <a:p>
+                      <a:pPr lvl="0" algn="just">
+                        <a:buNone/>
+                      </a:pPr>
                       <a:r>
-                        <a:rPr lang="en-IN" sz="1200">
+                        <a:rPr lang="en-IN" sz="1500">
                           <a:latin typeface="Times New Roman" panose="02020603050405020304" pitchFamily="18" charset="0"/>
                           <a:cs typeface="Times New Roman" panose="02020603050405020304" pitchFamily="18" charset="0"/>
                         </a:rPr>
@@ -7228,87 +7148,102 @@
                       </a:r>
                     </a:p>
                   </a:txBody>
-                  <a:tcPr marL="38170" marR="38170" marT="19085" marB="19085" anchor="ctr"/>
+                  <a:tcPr anchor="ctr"/>
                 </a:tc>
                 <a:tc>
                   <a:txBody>
                     <a:bodyPr/>
                     <a:lstStyle/>
                     <a:p>
+                      <a:pPr lvl="0" algn="just">
+                        <a:buNone/>
+                      </a:pPr>
                       <a:r>
-                        <a:rPr lang="en-IN" sz="1200">
+                        <a:rPr lang="en-IN" sz="1500">
                           <a:latin typeface="Times New Roman" panose="02020603050405020304" pitchFamily="18" charset="0"/>
                           <a:cs typeface="Times New Roman" panose="02020603050405020304" pitchFamily="18" charset="0"/>
                         </a:rPr>
-                        <a:t>Event Recommendations</a:t>
+                        <a:t>Residential Energy Consumption</a:t>
                       </a:r>
                     </a:p>
                   </a:txBody>
-                  <a:tcPr marL="38170" marR="38170" marT="19085" marB="19085" anchor="ctr"/>
+                  <a:tcPr anchor="ctr"/>
                 </a:tc>
                 <a:tc>
                   <a:txBody>
                     <a:bodyPr/>
                     <a:lstStyle/>
                     <a:p>
+                      <a:pPr lvl="0" algn="just">
+                        <a:buNone/>
+                      </a:pPr>
                       <a:r>
-                        <a:rPr lang="en-IN" sz="1200">
+                        <a:rPr lang="en-IN" sz="1500">
                           <a:latin typeface="Times New Roman" panose="02020603050405020304" pitchFamily="18" charset="0"/>
                           <a:cs typeface="Times New Roman" panose="02020603050405020304" pitchFamily="18" charset="0"/>
                         </a:rPr>
-                        <a:t>Chen &amp; Sun, 2016</a:t>
+                        <a:t>Wang et al., 2018</a:t>
                       </a:r>
                     </a:p>
                   </a:txBody>
-                  <a:tcPr marL="38170" marR="38170" marT="19085" marB="19085" anchor="ctr"/>
+                  <a:tcPr anchor="ctr"/>
                 </a:tc>
                 <a:tc>
                   <a:txBody>
                     <a:bodyPr/>
                     <a:lstStyle/>
                     <a:p>
+                      <a:pPr lvl="0" algn="just">
+                        <a:buNone/>
+                      </a:pPr>
                       <a:r>
-                        <a:rPr lang="en-IN" sz="1200" dirty="0">
+                        <a:rPr lang="en-IN" sz="1500">
                           <a:latin typeface="Times New Roman" panose="02020603050405020304" pitchFamily="18" charset="0"/>
                           <a:cs typeface="Times New Roman" panose="02020603050405020304" pitchFamily="18" charset="0"/>
                         </a:rPr>
-                        <a:t>Social Network Recommendation</a:t>
+                        <a:t>Association Rule Mining, Clustering</a:t>
                       </a:r>
                     </a:p>
                   </a:txBody>
-                  <a:tcPr marL="38170" marR="38170" marT="19085" marB="19085" anchor="ctr"/>
+                  <a:tcPr anchor="ctr"/>
                 </a:tc>
                 <a:tc>
                   <a:txBody>
                     <a:bodyPr/>
                     <a:lstStyle/>
                     <a:p>
+                      <a:pPr lvl="0" algn="just">
+                        <a:buNone/>
+                      </a:pPr>
                       <a:r>
-                        <a:rPr lang="en-US" sz="1200">
+                        <a:rPr lang="en-IN" sz="1500">
                           <a:latin typeface="Times New Roman" panose="02020603050405020304" pitchFamily="18" charset="0"/>
                           <a:cs typeface="Times New Roman" panose="02020603050405020304" pitchFamily="18" charset="0"/>
                         </a:rPr>
-                        <a:t>Social connections and previous attendance can improve event recommendations.</a:t>
+                        <a:t>Household characteristics and consumption patterns reveal useful relationships in electricity usage.</a:t>
                       </a:r>
                     </a:p>
                   </a:txBody>
-                  <a:tcPr marL="38170" marR="38170" marT="19085" marB="19085" anchor="ctr"/>
+                  <a:tcPr anchor="ctr"/>
                 </a:tc>
                 <a:tc>
                   <a:txBody>
                     <a:bodyPr/>
                     <a:lstStyle/>
                     <a:p>
+                      <a:pPr lvl="0" algn="just">
+                        <a:buNone/>
+                      </a:pPr>
                       <a:r>
-                        <a:rPr lang="en-IN" sz="1200">
+                        <a:rPr lang="en-IN" sz="1500">
                           <a:latin typeface="Times New Roman" panose="02020603050405020304" pitchFamily="18" charset="0"/>
                           <a:cs typeface="Times New Roman" panose="02020603050405020304" pitchFamily="18" charset="0"/>
                         </a:rPr>
-                        <a:t>Recommends suitable activities to users.</a:t>
+                        <a:t>Applies Apriori rules to discover energy-wasting behaviors and usage correlations.</a:t>
                       </a:r>
                     </a:p>
                   </a:txBody>
-                  <a:tcPr marL="38170" marR="38170" marT="19085" marB="19085" anchor="ctr"/>
+                  <a:tcPr anchor="ctr"/>
                 </a:tc>
                 <a:extLst>
                   <a:ext uri="{0D108BD9-81ED-4DB2-BD59-A6C34878D82A}">
@@ -7322,8 +7257,11 @@
                     <a:bodyPr/>
                     <a:lstStyle/>
                     <a:p>
+                      <a:pPr lvl="0" algn="just">
+                        <a:buNone/>
+                      </a:pPr>
                       <a:r>
-                        <a:rPr lang="en-IN" sz="1200">
+                        <a:rPr lang="en-IN" sz="1500">
                           <a:latin typeface="Times New Roman" panose="02020603050405020304" pitchFamily="18" charset="0"/>
                           <a:cs typeface="Times New Roman" panose="02020603050405020304" pitchFamily="18" charset="0"/>
                         </a:rPr>
@@ -7331,87 +7269,102 @@
                       </a:r>
                     </a:p>
                   </a:txBody>
-                  <a:tcPr marL="38170" marR="38170" marT="19085" marB="19085" anchor="ctr"/>
+                  <a:tcPr anchor="ctr"/>
                 </a:tc>
                 <a:tc>
                   <a:txBody>
                     <a:bodyPr/>
                     <a:lstStyle/>
                     <a:p>
+                      <a:pPr lvl="0" algn="just">
+                        <a:buNone/>
+                      </a:pPr>
                       <a:r>
-                        <a:rPr lang="en-IN" sz="1200">
+                        <a:rPr lang="en-IN" sz="1500">
                           <a:latin typeface="Times New Roman" panose="02020603050405020304" pitchFamily="18" charset="0"/>
                           <a:cs typeface="Times New Roman" panose="02020603050405020304" pitchFamily="18" charset="0"/>
                         </a:rPr>
-                        <a:t>Context-Aware Recommendations</a:t>
+                        <a:t>Demand Response and Renewable Energy</a:t>
                       </a:r>
                     </a:p>
                   </a:txBody>
-                  <a:tcPr marL="38170" marR="38170" marT="19085" marB="19085" anchor="ctr"/>
+                  <a:tcPr anchor="ctr"/>
                 </a:tc>
                 <a:tc>
                   <a:txBody>
                     <a:bodyPr/>
                     <a:lstStyle/>
                     <a:p>
+                      <a:pPr lvl="0" algn="just">
+                        <a:buNone/>
+                      </a:pPr>
                       <a:r>
-                        <a:rPr lang="en-IN" sz="1200">
+                        <a:rPr lang="en-IN" sz="1500">
                           <a:latin typeface="Times New Roman" panose="02020603050405020304" pitchFamily="18" charset="0"/>
                           <a:cs typeface="Times New Roman" panose="02020603050405020304" pitchFamily="18" charset="0"/>
                         </a:rPr>
-                        <a:t>Huang et al., 2020</a:t>
+                        <a:t>Smart Meters Time-Series Study, 2021</a:t>
                       </a:r>
                     </a:p>
                   </a:txBody>
-                  <a:tcPr marL="38170" marR="38170" marT="19085" marB="19085" anchor="ctr"/>
+                  <a:tcPr anchor="ctr"/>
                 </a:tc>
                 <a:tc>
                   <a:txBody>
                     <a:bodyPr/>
                     <a:lstStyle/>
                     <a:p>
+                      <a:pPr lvl="0" algn="just">
+                        <a:buNone/>
+                      </a:pPr>
                       <a:r>
-                        <a:rPr lang="en-IN" sz="1200">
+                        <a:rPr lang="en-IN" sz="1500">
                           <a:latin typeface="Times New Roman" panose="02020603050405020304" pitchFamily="18" charset="0"/>
                           <a:cs typeface="Times New Roman" panose="02020603050405020304" pitchFamily="18" charset="0"/>
                         </a:rPr>
-                        <a:t>Context-Aware Recommendation</a:t>
+                        <a:t>Time-Series Clustering, Demand Response</a:t>
                       </a:r>
                     </a:p>
                   </a:txBody>
-                  <a:tcPr marL="38170" marR="38170" marT="19085" marB="19085" anchor="ctr"/>
+                  <a:tcPr anchor="ctr"/>
                 </a:tc>
                 <a:tc>
                   <a:txBody>
                     <a:bodyPr/>
                     <a:lstStyle/>
                     <a:p>
+                      <a:pPr lvl="0" algn="just">
+                        <a:buNone/>
+                      </a:pPr>
                       <a:r>
-                        <a:rPr lang="en-IN" sz="1200">
+                        <a:rPr lang="en-IN" sz="1500">
                           <a:latin typeface="Times New Roman" panose="02020603050405020304" pitchFamily="18" charset="0"/>
                           <a:cs typeface="Times New Roman" panose="02020603050405020304" pitchFamily="18" charset="0"/>
                         </a:rPr>
-                        <a:t>User preferences and event context improve recommendations.</a:t>
+                        <a:t>Smart-meter clustering helps identify flexible consumption patterns that can support renewable energy integration.</a:t>
                       </a:r>
                     </a:p>
                   </a:txBody>
-                  <a:tcPr marL="38170" marR="38170" marT="19085" marB="19085" anchor="ctr"/>
+                  <a:tcPr anchor="ctr"/>
                 </a:tc>
                 <a:tc>
                   <a:txBody>
                     <a:bodyPr/>
                     <a:lstStyle/>
                     <a:p>
+                      <a:pPr lvl="0" algn="just">
+                        <a:buNone/>
+                      </a:pPr>
                       <a:r>
-                        <a:rPr lang="en-US" sz="1200">
+                        <a:rPr lang="en-IN" sz="1500">
                           <a:latin typeface="Times New Roman" panose="02020603050405020304" pitchFamily="18" charset="0"/>
                           <a:cs typeface="Times New Roman" panose="02020603050405020304" pitchFamily="18" charset="0"/>
                         </a:rPr>
-                        <a:t>Filters activities by category, date, and location.</a:t>
+                        <a:t>Identifies opportunities to shift electricity usage away from peak hours.</a:t>
                       </a:r>
                     </a:p>
                   </a:txBody>
-                  <a:tcPr marL="38170" marR="38170" marT="19085" marB="19085" anchor="ctr"/>
+                  <a:tcPr anchor="ctr"/>
                 </a:tc>
                 <a:extLst>
                   <a:ext uri="{0D108BD9-81ED-4DB2-BD59-A6C34878D82A}">
@@ -7425,8 +7378,11 @@
                     <a:bodyPr/>
                     <a:lstStyle/>
                     <a:p>
+                      <a:pPr lvl="0" algn="just">
+                        <a:buNone/>
+                      </a:pPr>
                       <a:r>
-                        <a:rPr lang="en-IN" sz="1200">
+                        <a:rPr lang="en-IN" sz="1500">
                           <a:latin typeface="Times New Roman" panose="02020603050405020304" pitchFamily="18" charset="0"/>
                           <a:cs typeface="Times New Roman" panose="02020603050405020304" pitchFamily="18" charset="0"/>
                         </a:rPr>
@@ -7434,87 +7390,102 @@
                       </a:r>
                     </a:p>
                   </a:txBody>
-                  <a:tcPr marL="38170" marR="38170" marT="19085" marB="19085" anchor="ctr"/>
+                  <a:tcPr anchor="ctr"/>
                 </a:tc>
                 <a:tc>
                   <a:txBody>
                     <a:bodyPr/>
                     <a:lstStyle/>
                     <a:p>
+                      <a:pPr lvl="0" algn="just">
+                        <a:buNone/>
+                      </a:pPr>
                       <a:r>
-                        <a:rPr lang="en-IN" sz="1200">
+                        <a:rPr lang="en-IN" sz="1500">
                           <a:latin typeface="Times New Roman" panose="02020603050405020304" pitchFamily="18" charset="0"/>
                           <a:cs typeface="Times New Roman" panose="02020603050405020304" pitchFamily="18" charset="0"/>
                         </a:rPr>
-                        <a:t>Group Recommendations</a:t>
+                        <a:t>Energy Forecasting and Climate Impact</a:t>
                       </a:r>
                     </a:p>
                   </a:txBody>
-                  <a:tcPr marL="38170" marR="38170" marT="19085" marB="19085" anchor="ctr"/>
+                  <a:tcPr anchor="ctr"/>
                 </a:tc>
                 <a:tc>
                   <a:txBody>
                     <a:bodyPr/>
                     <a:lstStyle/>
                     <a:p>
+                      <a:pPr lvl="0" algn="just">
+                        <a:buNone/>
+                      </a:pPr>
                       <a:r>
-                        <a:rPr lang="en-IN" sz="1200">
+                        <a:rPr lang="en-IN" sz="1500">
                           <a:latin typeface="Times New Roman" panose="02020603050405020304" pitchFamily="18" charset="0"/>
                           <a:cs typeface="Times New Roman" panose="02020603050405020304" pitchFamily="18" charset="0"/>
                         </a:rPr>
-                        <a:t>2023 Research Paper</a:t>
+                        <a:t>de Mattos Neto et al., 2021</a:t>
                       </a:r>
                     </a:p>
                   </a:txBody>
-                  <a:tcPr marL="38170" marR="38170" marT="19085" marB="19085" anchor="ctr"/>
+                  <a:tcPr anchor="ctr"/>
                 </a:tc>
                 <a:tc>
                   <a:txBody>
                     <a:bodyPr/>
                     <a:lstStyle/>
                     <a:p>
+                      <a:pPr lvl="0" algn="just">
+                        <a:buNone/>
+                      </a:pPr>
                       <a:r>
-                        <a:rPr lang="en-US" sz="1200">
+                        <a:rPr lang="en-IN" sz="1500">
                           <a:latin typeface="Times New Roman" panose="02020603050405020304" pitchFamily="18" charset="0"/>
                           <a:cs typeface="Times New Roman" panose="02020603050405020304" pitchFamily="18" charset="0"/>
                         </a:rPr>
-                        <a:t>Social Trust and Knowledge Propagation</a:t>
+                        <a:t>Extreme Learning Machine Ensemble</a:t>
                       </a:r>
                     </a:p>
                   </a:txBody>
-                  <a:tcPr marL="38170" marR="38170" marT="19085" marB="19085" anchor="ctr"/>
+                  <a:tcPr anchor="ctr"/>
                 </a:tc>
                 <a:tc>
                   <a:txBody>
                     <a:bodyPr/>
                     <a:lstStyle/>
                     <a:p>
+                      <a:pPr lvl="0" algn="just">
+                        <a:buNone/>
+                      </a:pPr>
                       <a:r>
-                        <a:rPr lang="en-US" sz="1200">
+                        <a:rPr lang="en-IN" sz="1500">
                           <a:latin typeface="Times New Roman" panose="02020603050405020304" pitchFamily="18" charset="0"/>
                           <a:cs typeface="Times New Roman" panose="02020603050405020304" pitchFamily="18" charset="0"/>
                         </a:rPr>
-                        <a:t>Group preferences and social relationships can support group recommendations.</a:t>
+                        <a:t>Ensemble machine-learning models can improve electricity consumption forecasting.</a:t>
                       </a:r>
                     </a:p>
                   </a:txBody>
-                  <a:tcPr marL="38170" marR="38170" marT="19085" marB="19085" anchor="ctr"/>
+                  <a:tcPr anchor="ctr"/>
                 </a:tc>
                 <a:tc>
                   <a:txBody>
                     <a:bodyPr/>
                     <a:lstStyle/>
                     <a:p>
+                      <a:pPr lvl="0" algn="just">
+                        <a:buNone/>
+                      </a:pPr>
                       <a:r>
-                        <a:rPr lang="en-US" sz="1200" dirty="0">
+                        <a:rPr lang="en-IN" sz="1500" dirty="0">
                           <a:latin typeface="Times New Roman" panose="02020603050405020304" pitchFamily="18" charset="0"/>
                           <a:cs typeface="Times New Roman" panose="02020603050405020304" pitchFamily="18" charset="0"/>
                         </a:rPr>
-                        <a:t>Helps users discover activities for shared interests.</a:t>
+                        <a:t>Provides a research foundation for energy forecasting and data-driven policy impact analysis.</a:t>
                       </a:r>
                     </a:p>
                   </a:txBody>
-                  <a:tcPr marL="38170" marR="38170" marT="19085" marB="19085" anchor="ctr"/>
+                  <a:tcPr anchor="ctr"/>
                 </a:tc>
                 <a:extLst>
                   <a:ext uri="{0D108BD9-81ED-4DB2-BD59-A6C34878D82A}">
@@ -7774,7 +7745,7 @@
 </p:sld>
 </file>
 
-<file path=ppt/slides/slide6.xml><?xml version="1.0" encoding="utf-8"?>
+<file path=ppt/slides/slide7.xml><?xml version="1.0" encoding="utf-8"?>
 <p:sld xmlns:a="http://schemas.openxmlformats.org/drawingml/2006/main" xmlns:r="http://schemas.openxmlformats.org/officeDocument/2006/relationships" xmlns:p="http://schemas.openxmlformats.org/presentationml/2006/main">
   <p:cSld>
     <p:spTree>
@@ -7918,8 +7889,8 @@
         </p:nvSpPr>
         <p:spPr bwMode="auto">
           <a:xfrm rot="10800000" flipV="1">
-            <a:off x="833230" y="2169438"/>
-            <a:ext cx="10896600" cy="2806987"/>
+            <a:off x="833230" y="1525832"/>
+            <a:ext cx="10896600" cy="4094198"/>
           </a:xfrm>
           <a:prstGeom prst="rect">
             <a:avLst/>
@@ -7984,7 +7955,7 @@
               <a:tabLst/>
             </a:pPr>
             <a:r>
-              <a:rPr kumimoji="0" lang="en-US" altLang="en-US" sz="2000" b="0" i="0" u="none" strike="noStrike" cap="none" normalizeH="0" baseline="0" dirty="0">
+              <a:rPr kumimoji="0" lang="en-US" altLang="en-US" sz="2200" b="0" i="0" u="none" strike="noStrike" cap="none" normalizeH="0" baseline="0" dirty="0">
                 <a:ln>
                   <a:noFill/>
                 </a:ln>
@@ -8016,7 +7987,7 @@
               <a:tabLst/>
             </a:pPr>
             <a:r>
-              <a:rPr kumimoji="0" lang="en-US" altLang="en-US" sz="2000" b="0" i="0" u="none" strike="noStrike" cap="none" normalizeH="0" baseline="0" dirty="0">
+              <a:rPr kumimoji="0" lang="en-US" altLang="en-US" sz="2200" b="0" i="0" u="none" strike="noStrike" cap="none" normalizeH="0" baseline="0" dirty="0">
                 <a:ln>
                   <a:noFill/>
                 </a:ln>
@@ -8048,7 +8019,7 @@
               <a:tabLst/>
             </a:pPr>
             <a:r>
-              <a:rPr kumimoji="0" lang="en-US" altLang="en-US" sz="2000" b="0" i="0" u="none" strike="noStrike" cap="none" normalizeH="0" baseline="0" dirty="0">
+              <a:rPr kumimoji="0" lang="en-US" altLang="en-US" sz="2200" b="0" i="0" u="none" strike="noStrike" cap="none" normalizeH="0" baseline="0" dirty="0">
                 <a:ln>
                   <a:noFill/>
                 </a:ln>
@@ -8080,7 +8051,7 @@
               <a:tabLst/>
             </a:pPr>
             <a:r>
-              <a:rPr kumimoji="0" lang="en-US" altLang="en-US" sz="2000" b="0" i="0" u="none" strike="noStrike" cap="none" normalizeH="0" baseline="0" dirty="0">
+              <a:rPr kumimoji="0" lang="en-US" altLang="en-US" sz="2200" b="0" i="0" u="none" strike="noStrike" cap="none" normalizeH="0" baseline="0" dirty="0">
                 <a:ln>
                   <a:noFill/>
                 </a:ln>
@@ -8112,7 +8083,7 @@
               <a:tabLst/>
             </a:pPr>
             <a:r>
-              <a:rPr kumimoji="0" lang="en-US" altLang="en-US" sz="2000" b="0" i="0" u="none" strike="noStrike" cap="none" normalizeH="0" baseline="0" dirty="0">
+              <a:rPr kumimoji="0" lang="en-US" altLang="en-US" sz="2200" b="0" i="0" u="none" strike="noStrike" cap="none" normalizeH="0" baseline="0" dirty="0">
                 <a:ln>
                   <a:noFill/>
                 </a:ln>
@@ -8141,7 +8112,7 @@
 </p:sld>
 </file>
 
-<file path=ppt/slides/slide7.xml><?xml version="1.0" encoding="utf-8"?>
+<file path=ppt/slides/slide8.xml><?xml version="1.0" encoding="utf-8"?>
 <p:sld xmlns:a="http://schemas.openxmlformats.org/drawingml/2006/main" xmlns:r="http://schemas.openxmlformats.org/officeDocument/2006/relationships" xmlns:p="http://schemas.openxmlformats.org/presentationml/2006/main">
   <p:cSld>
     <p:spTree>
@@ -8285,8 +8256,8 @@
         </p:nvSpPr>
         <p:spPr bwMode="auto">
           <a:xfrm rot="10800000" flipV="1">
-            <a:off x="922867" y="1925224"/>
-            <a:ext cx="11269133" cy="2806987"/>
+            <a:off x="461433" y="1261655"/>
+            <a:ext cx="11269133" cy="5011949"/>
           </a:xfrm>
           <a:prstGeom prst="rect">
             <a:avLst/>
@@ -8351,7 +8322,7 @@
               <a:tabLst/>
             </a:pPr>
             <a:r>
-              <a:rPr kumimoji="0" lang="en-US" altLang="en-US" sz="2000" b="0" i="0" u="none" strike="noStrike" cap="none" normalizeH="0" baseline="0" dirty="0">
+              <a:rPr kumimoji="0" lang="en-US" altLang="en-US" sz="2400" b="0" i="0" u="none" strike="noStrike" cap="none" normalizeH="0" baseline="0" dirty="0">
                 <a:ln>
                   <a:noFill/>
                 </a:ln>
@@ -8383,7 +8354,7 @@
               <a:tabLst/>
             </a:pPr>
             <a:r>
-              <a:rPr kumimoji="0" lang="en-US" altLang="en-US" sz="2000" b="0" i="0" u="none" strike="noStrike" cap="none" normalizeH="0" baseline="0" dirty="0">
+              <a:rPr kumimoji="0" lang="en-US" altLang="en-US" sz="2400" b="0" i="0" u="none" strike="noStrike" cap="none" normalizeH="0" baseline="0" dirty="0">
                 <a:ln>
                   <a:noFill/>
                 </a:ln>
@@ -8415,7 +8386,7 @@
               <a:tabLst/>
             </a:pPr>
             <a:r>
-              <a:rPr kumimoji="0" lang="en-US" altLang="en-US" sz="2000" b="0" i="0" u="none" strike="noStrike" cap="none" normalizeH="0" baseline="0" dirty="0">
+              <a:rPr kumimoji="0" lang="en-US" altLang="en-US" sz="2400" b="0" i="0" u="none" strike="noStrike" cap="none" normalizeH="0" baseline="0" dirty="0">
                 <a:ln>
                   <a:noFill/>
                 </a:ln>
@@ -8447,7 +8418,7 @@
               <a:tabLst/>
             </a:pPr>
             <a:r>
-              <a:rPr kumimoji="0" lang="en-US" altLang="en-US" sz="2000" b="0" i="0" u="none" strike="noStrike" cap="none" normalizeH="0" baseline="0" dirty="0">
+              <a:rPr kumimoji="0" lang="en-US" altLang="en-US" sz="2400" b="0" i="0" u="none" strike="noStrike" cap="none" normalizeH="0" baseline="0" dirty="0">
                 <a:ln>
                   <a:noFill/>
                 </a:ln>
@@ -8479,7 +8450,7 @@
               <a:tabLst/>
             </a:pPr>
             <a:r>
-              <a:rPr kumimoji="0" lang="en-US" altLang="en-US" sz="2000" b="0" i="0" u="none" strike="noStrike" cap="none" normalizeH="0" baseline="0" dirty="0">
+              <a:rPr kumimoji="0" lang="en-US" altLang="en-US" sz="2400" b="0" i="0" u="none" strike="noStrike" cap="none" normalizeH="0" baseline="0" dirty="0">
                 <a:ln>
                   <a:noFill/>
                 </a:ln>
@@ -8499,180 +8470,6 @@
     <p:extLst>
       <p:ext uri="{BB962C8B-B14F-4D97-AF65-F5344CB8AC3E}">
         <p14:creationId xmlns:p14="http://schemas.microsoft.com/office/powerpoint/2010/main" val="3114469239"/>
-      </p:ext>
-    </p:extLst>
-  </p:cSld>
-  <p:clrMapOvr>
-    <a:masterClrMapping/>
-  </p:clrMapOvr>
-</p:sld>
-</file>
-
-<file path=ppt/slides/slide8.xml><?xml version="1.0" encoding="utf-8"?>
-<p:sld xmlns:a="http://schemas.openxmlformats.org/drawingml/2006/main" xmlns:r="http://schemas.openxmlformats.org/officeDocument/2006/relationships" xmlns:p="http://schemas.openxmlformats.org/presentationml/2006/main">
-  <p:cSld>
-    <p:spTree>
-      <p:nvGrpSpPr>
-        <p:cNvPr id="1" name=""/>
-        <p:cNvGrpSpPr/>
-        <p:nvPr/>
-      </p:nvGrpSpPr>
-      <p:grpSpPr>
-        <a:xfrm>
-          <a:off x="0" y="0"/>
-          <a:ext cx="0" cy="0"/>
-          <a:chOff x="0" y="0"/>
-          <a:chExt cx="0" cy="0"/>
-        </a:xfrm>
-      </p:grpSpPr>
-      <p:sp>
-        <p:nvSpPr>
-          <p:cNvPr id="2" name="Title 1">
-            <a:extLst>
-              <a:ext uri="{FF2B5EF4-FFF2-40B4-BE49-F238E27FC236}">
-                <a16:creationId xmlns:a16="http://schemas.microsoft.com/office/drawing/2014/main" id="{4255A8AF-7A82-DBFE-A390-60751A7EFB11}"/>
-              </a:ext>
-            </a:extLst>
-          </p:cNvPr>
-          <p:cNvSpPr>
-            <a:spLocks noGrp="1"/>
-          </p:cNvSpPr>
-          <p:nvPr>
-            <p:ph type="title"/>
-          </p:nvPr>
-        </p:nvSpPr>
-        <p:spPr/>
-        <p:txBody>
-          <a:bodyPr>
-            <a:normAutofit/>
-          </a:bodyPr>
-          <a:lstStyle/>
-          <a:p>
-            <a:r>
-              <a:rPr lang="en-US" sz="3200" dirty="0">
-                <a:solidFill>
-                  <a:srgbClr val="FF0000"/>
-                </a:solidFill>
-                <a:latin typeface="Times New Roman" panose="02020603050405020304" pitchFamily="18" charset="0"/>
-                <a:cs typeface="Times New Roman" panose="02020603050405020304" pitchFamily="18" charset="0"/>
-              </a:rPr>
-              <a:t>Module 3:-</a:t>
-            </a:r>
-            <a:r>
-              <a:rPr lang="en-IN" sz="3200" dirty="0">
-                <a:latin typeface="Times New Roman" panose="02020603050405020304" pitchFamily="18" charset="0"/>
-                <a:cs typeface="Times New Roman" panose="02020603050405020304" pitchFamily="18" charset="0"/>
-              </a:rPr>
-              <a:t>Decision Support &amp; Sustainability Dashboard</a:t>
-            </a:r>
-            <a:endParaRPr lang="en-IN" sz="3200" dirty="0">
-              <a:solidFill>
-                <a:srgbClr val="FF0000"/>
-              </a:solidFill>
-              <a:latin typeface="Times New Roman" panose="02020603050405020304" pitchFamily="18" charset="0"/>
-              <a:cs typeface="Times New Roman" panose="02020603050405020304" pitchFamily="18" charset="0"/>
-            </a:endParaRPr>
-          </a:p>
-        </p:txBody>
-      </p:sp>
-      <p:sp>
-        <p:nvSpPr>
-          <p:cNvPr id="3" name="Content Placeholder 2">
-            <a:extLst>
-              <a:ext uri="{FF2B5EF4-FFF2-40B4-BE49-F238E27FC236}">
-                <a16:creationId xmlns:a16="http://schemas.microsoft.com/office/drawing/2014/main" id="{E31FDDC4-C564-D3DA-A34F-DC90B212BE2C}"/>
-              </a:ext>
-            </a:extLst>
-          </p:cNvPr>
-          <p:cNvSpPr>
-            <a:spLocks noGrp="1"/>
-          </p:cNvSpPr>
-          <p:nvPr>
-            <p:ph idx="1"/>
-          </p:nvPr>
-        </p:nvSpPr>
-        <p:spPr/>
-        <p:txBody>
-          <a:bodyPr>
-            <a:normAutofit/>
-          </a:bodyPr>
-          <a:lstStyle/>
-          <a:p>
-            <a:pPr algn="just">
-              <a:lnSpc>
-                <a:spcPct val="150000"/>
-              </a:lnSpc>
-            </a:pPr>
-            <a:r>
-              <a:rPr lang="en-US" sz="2000" dirty="0">
-                <a:latin typeface="Times New Roman" panose="02020603050405020304" pitchFamily="18" charset="0"/>
-                <a:cs typeface="Times New Roman" panose="02020603050405020304" pitchFamily="18" charset="0"/>
-              </a:rPr>
-              <a:t>Displays electricity consumption, household statistics, and estimated CO₂ emissions through an interactive dashboard.</a:t>
-            </a:r>
-          </a:p>
-          <a:p>
-            <a:pPr algn="just">
-              <a:lnSpc>
-                <a:spcPct val="150000"/>
-              </a:lnSpc>
-            </a:pPr>
-            <a:r>
-              <a:rPr lang="en-US" sz="2000" dirty="0">
-                <a:latin typeface="Times New Roman" panose="02020603050405020304" pitchFamily="18" charset="0"/>
-                <a:cs typeface="Times New Roman" panose="02020603050405020304" pitchFamily="18" charset="0"/>
-              </a:rPr>
-              <a:t>Visualizes consumption trends and compares household groups based on usage patterns.</a:t>
-            </a:r>
-          </a:p>
-          <a:p>
-            <a:pPr algn="just">
-              <a:lnSpc>
-                <a:spcPct val="150000"/>
-              </a:lnSpc>
-            </a:pPr>
-            <a:r>
-              <a:rPr lang="en-US" sz="2000" dirty="0">
-                <a:latin typeface="Times New Roman" panose="02020603050405020304" pitchFamily="18" charset="0"/>
-                <a:cs typeface="Times New Roman" panose="02020603050405020304" pitchFamily="18" charset="0"/>
-              </a:rPr>
-              <a:t>Generates energy-saving recommendations using a knowledge-based retrieval system.</a:t>
-            </a:r>
-          </a:p>
-          <a:p>
-            <a:pPr algn="just">
-              <a:lnSpc>
-                <a:spcPct val="150000"/>
-              </a:lnSpc>
-            </a:pPr>
-            <a:r>
-              <a:rPr lang="en-US" sz="2000" dirty="0">
-                <a:latin typeface="Times New Roman" panose="02020603050405020304" pitchFamily="18" charset="0"/>
-                <a:cs typeface="Times New Roman" panose="02020603050405020304" pitchFamily="18" charset="0"/>
-              </a:rPr>
-              <a:t>Estimates potential electricity savings and CO₂ emission reductions through what-if analysis.</a:t>
-            </a:r>
-          </a:p>
-          <a:p>
-            <a:pPr algn="just">
-              <a:lnSpc>
-                <a:spcPct val="150000"/>
-              </a:lnSpc>
-            </a:pPr>
-            <a:r>
-              <a:rPr lang="en-US" sz="2000" dirty="0">
-                <a:latin typeface="Times New Roman" panose="02020603050405020304" pitchFamily="18" charset="0"/>
-                <a:cs typeface="Times New Roman" panose="02020603050405020304" pitchFamily="18" charset="0"/>
-              </a:rPr>
-              <a:t>Supports informed decision-making for energy efficiency and sustainable electricity consumption.</a:t>
-            </a:r>
-          </a:p>
-        </p:txBody>
-      </p:sp>
-    </p:spTree>
-    <p:extLst>
-      <p:ext uri="{BB962C8B-B14F-4D97-AF65-F5344CB8AC3E}">
-        <p14:creationId xmlns:p14="http://schemas.microsoft.com/office/powerpoint/2010/main" val="12424401"/>
       </p:ext>
     </p:extLst>
   </p:cSld>
@@ -8704,7 +8501,7 @@
           <p:cNvPr id="2" name="Title 1">
             <a:extLst>
               <a:ext uri="{FF2B5EF4-FFF2-40B4-BE49-F238E27FC236}">
-                <a16:creationId xmlns:a16="http://schemas.microsoft.com/office/drawing/2014/main" id="{74B89128-5671-8C7A-4CC0-726D9B32000A}"/>
+                <a16:creationId xmlns:a16="http://schemas.microsoft.com/office/drawing/2014/main" id="{4255A8AF-7A82-DBFE-A390-60751A7EFB11}"/>
               </a:ext>
             </a:extLst>
           </p:cNvPr>
@@ -8715,66 +8512,138 @@
             <p:ph type="title"/>
           </p:nvPr>
         </p:nvSpPr>
-        <p:spPr>
-          <a:xfrm>
-            <a:off x="1302026" y="257382"/>
-            <a:ext cx="10031896" cy="1193731"/>
-          </a:xfrm>
-        </p:spPr>
+        <p:spPr/>
         <p:txBody>
           <a:bodyPr>
             <a:normAutofit/>
           </a:bodyPr>
           <a:lstStyle/>
           <a:p>
-            <a:pPr algn="ctr"/>
-            <a:r>
-              <a:rPr lang="en-IN" sz="3600" dirty="0">
+            <a:r>
+              <a:rPr lang="en-US" sz="3200" dirty="0">
                 <a:solidFill>
                   <a:srgbClr val="FF0000"/>
                 </a:solidFill>
                 <a:latin typeface="Times New Roman" panose="02020603050405020304" pitchFamily="18" charset="0"/>
                 <a:cs typeface="Times New Roman" panose="02020603050405020304" pitchFamily="18" charset="0"/>
               </a:rPr>
-              <a:t>ARCHITECTURE DIAGRAM</a:t>
-            </a:r>
-          </a:p>
-        </p:txBody>
-      </p:sp>
-      <p:pic>
-        <p:nvPicPr>
-          <p:cNvPr id="6" name="Picture 5">
-            <a:extLst>
-              <a:ext uri="{FF2B5EF4-FFF2-40B4-BE49-F238E27FC236}">
-                <a16:creationId xmlns:a16="http://schemas.microsoft.com/office/drawing/2014/main" id="{E4BF12A8-E194-D698-7FF1-19B9D466BB42}"/>
-              </a:ext>
-            </a:extLst>
-          </p:cNvPr>
-          <p:cNvPicPr>
-            <a:picLocks noChangeAspect="1"/>
-          </p:cNvPicPr>
-          <p:nvPr/>
-        </p:nvPicPr>
-        <p:blipFill>
-          <a:blip r:embed="rId2"/>
-          <a:stretch>
-            <a:fillRect/>
-          </a:stretch>
-        </p:blipFill>
-        <p:spPr>
-          <a:xfrm>
-            <a:off x="2141220" y="1129475"/>
-            <a:ext cx="7571232" cy="5047488"/>
-          </a:xfrm>
-          <a:prstGeom prst="rect">
-            <a:avLst/>
-          </a:prstGeom>
-        </p:spPr>
-      </p:pic>
+              <a:t>Module 3:-</a:t>
+            </a:r>
+            <a:r>
+              <a:rPr lang="en-IN" sz="3200" dirty="0">
+                <a:latin typeface="Times New Roman" panose="02020603050405020304" pitchFamily="18" charset="0"/>
+                <a:cs typeface="Times New Roman" panose="02020603050405020304" pitchFamily="18" charset="0"/>
+              </a:rPr>
+              <a:t>Decision Support &amp; Sustainability Dashboard</a:t>
+            </a:r>
+            <a:endParaRPr lang="en-IN" sz="3200" dirty="0">
+              <a:solidFill>
+                <a:srgbClr val="FF0000"/>
+              </a:solidFill>
+              <a:latin typeface="Times New Roman" panose="02020603050405020304" pitchFamily="18" charset="0"/>
+              <a:cs typeface="Times New Roman" panose="02020603050405020304" pitchFamily="18" charset="0"/>
+            </a:endParaRPr>
+          </a:p>
+        </p:txBody>
+      </p:sp>
+      <p:sp>
+        <p:nvSpPr>
+          <p:cNvPr id="3" name="Content Placeholder 2">
+            <a:extLst>
+              <a:ext uri="{FF2B5EF4-FFF2-40B4-BE49-F238E27FC236}">
+                <a16:creationId xmlns:a16="http://schemas.microsoft.com/office/drawing/2014/main" id="{E31FDDC4-C564-D3DA-A34F-DC90B212BE2C}"/>
+              </a:ext>
+            </a:extLst>
+          </p:cNvPr>
+          <p:cNvSpPr>
+            <a:spLocks noGrp="1"/>
+          </p:cNvSpPr>
+          <p:nvPr>
+            <p:ph idx="1"/>
+          </p:nvPr>
+        </p:nvSpPr>
+        <p:spPr/>
+        <p:txBody>
+          <a:bodyPr>
+            <a:normAutofit fontScale="92500" lnSpcReduction="10000"/>
+          </a:bodyPr>
+          <a:lstStyle/>
+          <a:p>
+            <a:pPr algn="just">
+              <a:lnSpc>
+                <a:spcPct val="150000"/>
+              </a:lnSpc>
+            </a:pPr>
+            <a:r>
+              <a:rPr lang="en-US" sz="2400" dirty="0">
+                <a:latin typeface="Times New Roman" panose="02020603050405020304" pitchFamily="18" charset="0"/>
+                <a:cs typeface="Times New Roman" panose="02020603050405020304" pitchFamily="18" charset="0"/>
+              </a:rPr>
+              <a:t>Displays electricity consumption, household statistics, and estimated CO₂ emissions through an interactive dashboard.</a:t>
+            </a:r>
+          </a:p>
+          <a:p>
+            <a:pPr algn="just">
+              <a:lnSpc>
+                <a:spcPct val="150000"/>
+              </a:lnSpc>
+            </a:pPr>
+            <a:r>
+              <a:rPr lang="en-US" sz="2400" dirty="0">
+                <a:latin typeface="Times New Roman" panose="02020603050405020304" pitchFamily="18" charset="0"/>
+                <a:cs typeface="Times New Roman" panose="02020603050405020304" pitchFamily="18" charset="0"/>
+              </a:rPr>
+              <a:t>Visualizes consumption trends and compares household groups based on usage patterns.</a:t>
+            </a:r>
+          </a:p>
+          <a:p>
+            <a:pPr algn="just">
+              <a:lnSpc>
+                <a:spcPct val="150000"/>
+              </a:lnSpc>
+            </a:pPr>
+            <a:r>
+              <a:rPr lang="en-US" sz="2400" dirty="0">
+                <a:latin typeface="Times New Roman" panose="02020603050405020304" pitchFamily="18" charset="0"/>
+                <a:cs typeface="Times New Roman" panose="02020603050405020304" pitchFamily="18" charset="0"/>
+              </a:rPr>
+              <a:t>Generates energy-saving recommendations using a knowledge-based retrieval system.</a:t>
+            </a:r>
+          </a:p>
+          <a:p>
+            <a:pPr algn="just">
+              <a:lnSpc>
+                <a:spcPct val="150000"/>
+              </a:lnSpc>
+            </a:pPr>
+            <a:r>
+              <a:rPr lang="en-US" sz="2400" dirty="0">
+                <a:latin typeface="Times New Roman" panose="02020603050405020304" pitchFamily="18" charset="0"/>
+                <a:cs typeface="Times New Roman" panose="02020603050405020304" pitchFamily="18" charset="0"/>
+              </a:rPr>
+              <a:t>Estimates potential electricity savings and CO₂ emission reductions through what-if analysis.</a:t>
+            </a:r>
+          </a:p>
+          <a:p>
+            <a:pPr algn="just">
+              <a:lnSpc>
+                <a:spcPct val="150000"/>
+              </a:lnSpc>
+            </a:pPr>
+            <a:r>
+              <a:rPr lang="en-US" sz="2400" dirty="0">
+                <a:latin typeface="Times New Roman" panose="02020603050405020304" pitchFamily="18" charset="0"/>
+                <a:cs typeface="Times New Roman" panose="02020603050405020304" pitchFamily="18" charset="0"/>
+              </a:rPr>
+              <a:t>Supports informed decision-making for energy efficiency and sustainable electricity consumption.</a:t>
+            </a:r>
+          </a:p>
+        </p:txBody>
+      </p:sp>
     </p:spTree>
     <p:extLst>
       <p:ext uri="{BB962C8B-B14F-4D97-AF65-F5344CB8AC3E}">
-        <p14:creationId xmlns:p14="http://schemas.microsoft.com/office/powerpoint/2010/main" val="2788832717"/>
+        <p14:creationId xmlns:p14="http://schemas.microsoft.com/office/powerpoint/2010/main" val="12424401"/>
       </p:ext>
     </p:extLst>
   </p:cSld>
